--- a/deck/GB10-Demos-for-Events.pptx
+++ b/deck/GB10-Demos-for-Events.pptx
@@ -29,6 +29,9 @@
     <p:sldId id="277" r:id="rId29"/>
     <p:sldId id="278" r:id="rId30"/>
     <p:sldId id="279" r:id="rId31"/>
+    <p:sldId id="280" r:id="rId32"/>
+    <p:sldId id="281" r:id="rId33"/>
+    <p:sldId id="282" r:id="rId34"/>
   </p:sldIdLst>
   <p:sldSz cx="12191695" cy="6858000" type="screen4x3"/>
   <p:notesSz cx="6858000" cy="9144000"/>
@@ -1575,7 +1578,7 @@
           <a:lstStyle/>
           <a:p>
             <a:r>
-              <a:t>Volunteering this early buys more trust than it costs. Risk teams will find it anyway.</a:t>
+              <a:t>Lead with this, do not wait to be asked. Being the people who found it is a far stronger position than being the people who shipped it. TabFormer generates fraud in campaigns and each campaign sits in one geography; the benchmark split lands the whole test period inside a single-city campaign.</a:t>
             </a:r>
           </a:p>
         </p:txBody>
@@ -1601,6 +1604,216 @@
 </file>
 
 <file path=ppt/notesSlides/notesSlide24.xml><?xml version="1.0" encoding="utf-8"?>
+<p:notes xmlns:a="http://schemas.openxmlformats.org/drawingml/2006/main" xmlns:p="http://schemas.openxmlformats.org/presentationml/2006/main" xmlns:r="http://schemas.openxmlformats.org/officeDocument/2006/relationships">
+  <p:cSld>
+    <p:spTree>
+      <p:nvGrpSpPr>
+        <p:cNvPr id="1" name=""/>
+        <p:cNvGrpSpPr/>
+        <p:nvPr/>
+      </p:nvGrpSpPr>
+      <p:grpSpPr>
+        <a:xfrm>
+          <a:off x="0" y="0"/>
+          <a:ext cx="0" cy="0"/>
+          <a:chOff x="0" y="0"/>
+          <a:chExt cx="0" cy="0"/>
+        </a:xfrm>
+      </p:grpSpPr>
+      <p:sp>
+        <p:nvSpPr>
+          <p:cNvPr id="2" name="Slide Image Placeholder 1"/>
+          <p:cNvSpPr>
+            <a:spLocks noGrp="1"/>
+          </p:cNvSpPr>
+          <p:nvPr>
+            <p:ph type="sldImg" idx="2"/>
+          </p:nvPr>
+        </p:nvSpPr>
+        <p:spPr/>
+      </p:sp>
+      <p:sp>
+        <p:nvSpPr>
+          <p:cNvPr id="3" name="Notes Placeholder 2"/>
+          <p:cNvSpPr>
+            <a:spLocks noGrp="1"/>
+          </p:cNvSpPr>
+          <p:nvPr>
+            <p:ph type="body" idx="3" sz="quarter"/>
+          </p:nvPr>
+        </p:nvSpPr>
+        <p:spPr/>
+        <p:txBody>
+          <a:bodyPr/>
+          <a:lstStyle/>
+          <a:p>
+            <a:r>
+              <a:t>This is the slide that makes the commercial argument. The high-precision dataset is the one where our thesis is false; this is the one where it is true. Precision 0.82 vs 0.68 is the number to say out loud.</a:t>
+            </a:r>
+          </a:p>
+        </p:txBody>
+      </p:sp>
+      <p:sp>
+        <p:nvSpPr>
+          <p:cNvPr id="4" name="Slide Number Placeholder 3"/>
+          <p:cNvSpPr>
+            <a:spLocks noGrp="1"/>
+          </p:cNvSpPr>
+          <p:nvPr>
+            <p:ph type="sldNum" idx="5" sz="quarter"/>
+          </p:nvPr>
+        </p:nvSpPr>
+        <p:spPr/>
+      </p:sp>
+    </p:spTree>
+  </p:cSld>
+  <p:clrMapOvr>
+    <a:masterClrMapping/>
+  </p:clrMapOvr>
+</p:notes>
+</file>
+
+<file path=ppt/notesSlides/notesSlide25.xml><?xml version="1.0" encoding="utf-8"?>
+<p:notes xmlns:a="http://schemas.openxmlformats.org/drawingml/2006/main" xmlns:p="http://schemas.openxmlformats.org/presentationml/2006/main" xmlns:r="http://schemas.openxmlformats.org/officeDocument/2006/relationships">
+  <p:cSld>
+    <p:spTree>
+      <p:nvGrpSpPr>
+        <p:cNvPr id="1" name=""/>
+        <p:cNvGrpSpPr/>
+        <p:nvPr/>
+      </p:nvGrpSpPr>
+      <p:grpSpPr>
+        <a:xfrm>
+          <a:off x="0" y="0"/>
+          <a:ext cx="0" cy="0"/>
+          <a:chOff x="0" y="0"/>
+          <a:chExt cx="0" cy="0"/>
+        </a:xfrm>
+      </p:grpSpPr>
+      <p:sp>
+        <p:nvSpPr>
+          <p:cNvPr id="2" name="Slide Image Placeholder 1"/>
+          <p:cNvSpPr>
+            <a:spLocks noGrp="1"/>
+          </p:cNvSpPr>
+          <p:nvPr>
+            <p:ph type="sldImg" idx="2"/>
+          </p:nvPr>
+        </p:nvSpPr>
+        <p:spPr/>
+      </p:sp>
+      <p:sp>
+        <p:nvSpPr>
+          <p:cNvPr id="3" name="Notes Placeholder 2"/>
+          <p:cNvSpPr>
+            <a:spLocks noGrp="1"/>
+          </p:cNvSpPr>
+          <p:nvPr>
+            <p:ph type="body" idx="3" sz="quarter"/>
+          </p:nvPr>
+        </p:nvSpPr>
+        <p:spPr/>
+        <p:txBody>
+          <a:bodyPr/>
+          <a:lstStyle/>
+          <a:p>
+            <a:r>
+              <a:t>Close on the PoC. Expect absolute F1 on production data below 0.78, not above — harsher base rate, noisier labels. Say so. The ranking metric is what they can check themselves.</a:t>
+            </a:r>
+          </a:p>
+        </p:txBody>
+      </p:sp>
+      <p:sp>
+        <p:nvSpPr>
+          <p:cNvPr id="4" name="Slide Number Placeholder 3"/>
+          <p:cNvSpPr>
+            <a:spLocks noGrp="1"/>
+          </p:cNvSpPr>
+          <p:nvPr>
+            <p:ph type="sldNum" idx="5" sz="quarter"/>
+          </p:nvPr>
+        </p:nvSpPr>
+        <p:spPr/>
+      </p:sp>
+    </p:spTree>
+  </p:cSld>
+  <p:clrMapOvr>
+    <a:masterClrMapping/>
+  </p:clrMapOvr>
+</p:notes>
+</file>
+
+<file path=ppt/notesSlides/notesSlide26.xml><?xml version="1.0" encoding="utf-8"?>
+<p:notes xmlns:a="http://schemas.openxmlformats.org/drawingml/2006/main" xmlns:p="http://schemas.openxmlformats.org/presentationml/2006/main" xmlns:r="http://schemas.openxmlformats.org/officeDocument/2006/relationships">
+  <p:cSld>
+    <p:spTree>
+      <p:nvGrpSpPr>
+        <p:cNvPr id="1" name=""/>
+        <p:cNvGrpSpPr/>
+        <p:nvPr/>
+      </p:nvGrpSpPr>
+      <p:grpSpPr>
+        <a:xfrm>
+          <a:off x="0" y="0"/>
+          <a:ext cx="0" cy="0"/>
+          <a:chOff x="0" y="0"/>
+          <a:chExt cx="0" cy="0"/>
+        </a:xfrm>
+      </p:grpSpPr>
+      <p:sp>
+        <p:nvSpPr>
+          <p:cNvPr id="2" name="Slide Image Placeholder 1"/>
+          <p:cNvSpPr>
+            <a:spLocks noGrp="1"/>
+          </p:cNvSpPr>
+          <p:nvPr>
+            <p:ph type="sldImg" idx="2"/>
+          </p:nvPr>
+        </p:nvSpPr>
+        <p:spPr/>
+      </p:sp>
+      <p:sp>
+        <p:nvSpPr>
+          <p:cNvPr id="3" name="Notes Placeholder 2"/>
+          <p:cNvSpPr>
+            <a:spLocks noGrp="1"/>
+          </p:cNvSpPr>
+          <p:nvPr>
+            <p:ph type="body" idx="3" sz="quarter"/>
+          </p:nvPr>
+        </p:nvSpPr>
+        <p:spPr/>
+        <p:txBody>
+          <a:bodyPr/>
+          <a:lstStyle/>
+          <a:p>
+            <a:r>
+              <a:t>Volunteering this early buys more trust than it costs. Risk teams will find it anyway.</a:t>
+            </a:r>
+          </a:p>
+        </p:txBody>
+      </p:sp>
+      <p:sp>
+        <p:nvSpPr>
+          <p:cNvPr id="4" name="Slide Number Placeholder 3"/>
+          <p:cNvSpPr>
+            <a:spLocks noGrp="1"/>
+          </p:cNvSpPr>
+          <p:nvPr>
+            <p:ph type="sldNum" idx="5" sz="quarter"/>
+          </p:nvPr>
+        </p:nvSpPr>
+        <p:spPr/>
+      </p:sp>
+    </p:spTree>
+  </p:cSld>
+  <p:clrMapOvr>
+    <a:masterClrMapping/>
+  </p:clrMapOvr>
+</p:notes>
+</file>
+
+<file path=ppt/notesSlides/notesSlide27.xml><?xml version="1.0" encoding="utf-8"?>
 <p:notes xmlns:a="http://schemas.openxmlformats.org/drawingml/2006/main" xmlns:p="http://schemas.openxmlformats.org/presentationml/2006/main" xmlns:r="http://schemas.openxmlformats.org/officeDocument/2006/relationships">
   <p:cSld>
     <p:spTree>
@@ -6134,7 +6347,7 @@
                 </a:solidFill>
                 <a:latin typeface="Consolas"/>
               </a:rPr>
-              <a:t>10 / 24</a:t>
+              <a:t>10 / 27</a:t>
             </a:r>
           </a:p>
         </p:txBody>
@@ -6514,7 +6727,7 @@
                 </a:solidFill>
                 <a:latin typeface="Consolas"/>
               </a:rPr>
-              <a:t>11 / 24</a:t>
+              <a:t>11 / 27</a:t>
             </a:r>
           </a:p>
         </p:txBody>
@@ -7353,7 +7566,7 @@
                 </a:solidFill>
                 <a:latin typeface="Consolas"/>
               </a:rPr>
-              <a:t>12 / 24</a:t>
+              <a:t>12 / 27</a:t>
             </a:r>
           </a:p>
         </p:txBody>
@@ -8192,7 +8405,7 @@
                 </a:solidFill>
                 <a:latin typeface="Consolas"/>
               </a:rPr>
-              <a:t>13 / 24</a:t>
+              <a:t>13 / 27</a:t>
             </a:r>
           </a:p>
         </p:txBody>
@@ -9031,7 +9244,7 @@
                 </a:solidFill>
                 <a:latin typeface="Consolas"/>
               </a:rPr>
-              <a:t>14 / 24</a:t>
+              <a:t>14 / 27</a:t>
             </a:r>
           </a:p>
         </p:txBody>
@@ -9870,7 +10083,7 @@
                 </a:solidFill>
                 <a:latin typeface="Consolas"/>
               </a:rPr>
-              <a:t>15 / 24</a:t>
+              <a:t>15 / 27</a:t>
             </a:r>
           </a:p>
         </p:txBody>
@@ -10250,7 +10463,7 @@
                 </a:solidFill>
                 <a:latin typeface="Consolas"/>
               </a:rPr>
-              <a:t>16 / 24</a:t>
+              <a:t>16 / 27</a:t>
             </a:r>
           </a:p>
         </p:txBody>
@@ -10911,7 +11124,7 @@
                 </a:solidFill>
                 <a:latin typeface="Consolas"/>
               </a:rPr>
-              <a:t>17 / 24</a:t>
+              <a:t>17 / 27</a:t>
             </a:r>
           </a:p>
         </p:txBody>
@@ -11291,7 +11504,7 @@
                 </a:solidFill>
                 <a:latin typeface="Consolas"/>
               </a:rPr>
-              <a:t>18 / 24</a:t>
+              <a:t>18 / 27</a:t>
             </a:r>
           </a:p>
         </p:txBody>
@@ -11913,7 +12126,7 @@
                 </a:solidFill>
                 <a:latin typeface="Consolas"/>
               </a:rPr>
-              <a:t>19 / 24</a:t>
+              <a:t>19 / 27</a:t>
             </a:r>
           </a:p>
         </p:txBody>
@@ -13091,7 +13304,7 @@
                 </a:solidFill>
                 <a:latin typeface="Consolas"/>
               </a:rPr>
-              <a:t>02 / 24</a:t>
+              <a:t>02 / 27</a:t>
             </a:r>
           </a:p>
         </p:txBody>
@@ -13471,7 +13684,7 @@
                 </a:solidFill>
                 <a:latin typeface="Consolas"/>
               </a:rPr>
-              <a:t>20 / 24</a:t>
+              <a:t>20 / 27</a:t>
             </a:r>
           </a:p>
         </p:txBody>
@@ -14214,7 +14427,7 @@
                 </a:solidFill>
                 <a:latin typeface="Consolas"/>
               </a:rPr>
-              <a:t>21 / 24</a:t>
+              <a:t>21 / 27</a:t>
             </a:r>
           </a:p>
         </p:txBody>
@@ -14768,7 +14981,7 @@
                 </a:solidFill>
                 <a:latin typeface="Consolas"/>
               </a:rPr>
-              <a:t>22 / 24</a:t>
+              <a:t>22 / 27</a:t>
             </a:r>
           </a:p>
         </p:txBody>
@@ -14957,7 +15170,7 @@
                 </a:solidFill>
                 <a:latin typeface="Consolas"/>
               </a:rPr>
-              <a:t>WHAT WE ARE NOT CLAIMING</a:t>
+              <a:t>READING THE BENCHMARK</a:t>
             </a:r>
           </a:p>
         </p:txBody>
@@ -14996,7 +15209,7 @@
                 </a:solidFill>
                 <a:latin typeface="Segoe UI"/>
               </a:rPr>
-              <a:t>The caveats, stated first</a:t>
+              <a:t>One column predicts the fraud</a:t>
             </a:r>
           </a:p>
         </p:txBody>
@@ -15053,8 +15266,8 @@
         </p:nvSpPr>
         <p:spPr>
           <a:xfrm>
-            <a:off x="731520" y="1965960"/>
-            <a:ext cx="10698480" cy="4114800"/>
+            <a:off x="731520" y="1874519"/>
+            <a:ext cx="10698480" cy="457200"/>
           </a:xfrm>
           <a:prstGeom prst="rect">
             <a:avLst/>
@@ -15069,136 +15282,666 @@
           <a:p>
             <a:pPr algn="l">
               <a:spcAft>
-                <a:spcPts val="300"/>
-              </a:spcAft>
-            </a:pPr>
-            <a:r>
-              <a:rPr sz="1800" b="1">
+                <a:spcPts val="0"/>
+              </a:spcAft>
+            </a:pPr>
+            <a:r>
+              <a:rPr sz="1500" b="0">
+                <a:solidFill>
+                  <a:srgbClr val="8BA0B6"/>
+                </a:solidFill>
+                <a:latin typeface="Segoe UI"/>
+              </a:rPr>
+              <a:t>In the slice of IBM TabFormer that the standard benchmark tests on, every one of the 2,087 fraudulent transactions occurs in the same city. Not most — all of them.</a:t>
+            </a:r>
+          </a:p>
+        </p:txBody>
+      </p:sp>
+      <p:sp>
+        <p:nvSpPr>
+          <p:cNvPr id="9" name="TextBox 8"/>
+          <p:cNvSpPr txBox="1"/>
+          <p:nvPr/>
+        </p:nvSpPr>
+        <p:spPr>
+          <a:xfrm>
+            <a:off x="731520" y="2487168"/>
+            <a:ext cx="10698480" cy="228600"/>
+          </a:xfrm>
+          <a:prstGeom prst="rect">
+            <a:avLst/>
+          </a:prstGeom>
+          <a:noFill/>
+        </p:spPr>
+        <p:txBody>
+          <a:bodyPr wrap="square" lIns="0" rIns="0" tIns="0" bIns="0">
+            <a:spAutoFit/>
+          </a:bodyPr>
+          <a:lstStyle/>
+          <a:p>
+            <a:pPr algn="l">
+              <a:spcAft>
+                <a:spcPts val="0"/>
+              </a:spcAft>
+            </a:pPr>
+            <a:r>
+              <a:rPr sz="1000" b="1">
+                <a:solidFill>
+                  <a:srgbClr val="8BA0B6"/>
+                </a:solidFill>
+                <a:latin typeface="Consolas"/>
+              </a:rPr>
+              <a:t>APPROACH                                                             PRECISION            RECALL                     F1</a:t>
+            </a:r>
+          </a:p>
+        </p:txBody>
+      </p:sp>
+      <p:sp>
+        <p:nvSpPr>
+          <p:cNvPr id="10" name="Rounded Rectangle 9"/>
+          <p:cNvSpPr/>
+          <p:nvPr/>
+        </p:nvSpPr>
+        <p:spPr>
+          <a:xfrm>
+            <a:off x="731520" y="2697480"/>
+            <a:ext cx="10698480" cy="1051560"/>
+          </a:xfrm>
+          <a:prstGeom prst="roundRect">
+            <a:avLst/>
+          </a:prstGeom>
+          <a:solidFill>
+            <a:srgbClr val="141C25"/>
+          </a:solidFill>
+          <a:ln w="9525">
+            <a:solidFill>
+              <a:srgbClr val="22303F"/>
+            </a:solidFill>
+          </a:ln>
+          <a:effectLst/>
+        </p:spPr>
+        <p:style>
+          <a:lnRef idx="1">
+            <a:schemeClr val="accent1"/>
+          </a:lnRef>
+          <a:fillRef idx="3">
+            <a:schemeClr val="accent1"/>
+          </a:fillRef>
+          <a:effectRef idx="2">
+            <a:schemeClr val="accent1"/>
+          </a:effectRef>
+          <a:fontRef idx="minor">
+            <a:schemeClr val="lt1"/>
+          </a:fontRef>
+        </p:style>
+        <p:txBody>
+          <a:bodyPr rtlCol="0" anchor="ctr"/>
+          <a:lstStyle/>
+          <a:p>
+            <a:pPr algn="ctr"/>
+          </a:p>
+        </p:txBody>
+      </p:sp>
+      <p:sp>
+        <p:nvSpPr>
+          <p:cNvPr id="11" name="TextBox 10"/>
+          <p:cNvSpPr txBox="1"/>
+          <p:nvPr/>
+        </p:nvSpPr>
+        <p:spPr>
+          <a:xfrm>
+            <a:off x="1005840" y="2880360"/>
+            <a:ext cx="4937760" cy="731520"/>
+          </a:xfrm>
+          <a:prstGeom prst="rect">
+            <a:avLst/>
+          </a:prstGeom>
+          <a:noFill/>
+        </p:spPr>
+        <p:txBody>
+          <a:bodyPr wrap="square" lIns="0" rIns="0" tIns="0" bIns="0">
+            <a:spAutoFit/>
+          </a:bodyPr>
+          <a:lstStyle/>
+          <a:p>
+            <a:pPr algn="l">
+              <a:spcAft>
+                <a:spcPts val="200"/>
+              </a:spcAft>
+            </a:pPr>
+            <a:r>
+              <a:rPr sz="1500" b="1">
+                <a:solidFill>
+                  <a:srgbClr val="FF5747"/>
+                </a:solidFill>
+                <a:latin typeface="Consolas"/>
+              </a:rPr>
+              <a:t>if city == "Rome"  →  fraud</a:t>
+            </a:r>
+          </a:p>
+          <a:p>
+            <a:pPr>
+              <a:spcAft>
+                <a:spcPts val="0"/>
+              </a:spcAft>
+            </a:pPr>
+            <a:r>
+              <a:rPr sz="1100" b="0">
+                <a:solidFill>
+                  <a:srgbClr val="8BA0B6"/>
+                </a:solidFill>
+                <a:latin typeface="Segoe UI"/>
+              </a:rPr>
+              <a:t>one line. no model.</a:t>
+            </a:r>
+          </a:p>
+        </p:txBody>
+      </p:sp>
+      <p:sp>
+        <p:nvSpPr>
+          <p:cNvPr id="12" name="TextBox 11"/>
+          <p:cNvSpPr txBox="1"/>
+          <p:nvPr/>
+        </p:nvSpPr>
+        <p:spPr>
+          <a:xfrm>
+            <a:off x="6309360" y="2953512"/>
+            <a:ext cx="1554480" cy="548640"/>
+          </a:xfrm>
+          <a:prstGeom prst="rect">
+            <a:avLst/>
+          </a:prstGeom>
+          <a:noFill/>
+        </p:spPr>
+        <p:txBody>
+          <a:bodyPr wrap="square" lIns="0" rIns="0" tIns="0" bIns="0">
+            <a:spAutoFit/>
+          </a:bodyPr>
+          <a:lstStyle/>
+          <a:p>
+            <a:pPr algn="l">
+              <a:spcAft>
+                <a:spcPts val="0"/>
+              </a:spcAft>
+            </a:pPr>
+            <a:r>
+              <a:rPr sz="2100" b="1">
                 <a:solidFill>
                   <a:srgbClr val="E8EEF5"/>
                 </a:solidFill>
+                <a:latin typeface="Consolas"/>
+              </a:rPr>
+              <a:t>0.9803</a:t>
+            </a:r>
+          </a:p>
+        </p:txBody>
+      </p:sp>
+      <p:sp>
+        <p:nvSpPr>
+          <p:cNvPr id="13" name="TextBox 12"/>
+          <p:cNvSpPr txBox="1"/>
+          <p:nvPr/>
+        </p:nvSpPr>
+        <p:spPr>
+          <a:xfrm>
+            <a:off x="8001000" y="2953512"/>
+            <a:ext cx="1554480" cy="548640"/>
+          </a:xfrm>
+          <a:prstGeom prst="rect">
+            <a:avLst/>
+          </a:prstGeom>
+          <a:noFill/>
+        </p:spPr>
+        <p:txBody>
+          <a:bodyPr wrap="square" lIns="0" rIns="0" tIns="0" bIns="0">
+            <a:spAutoFit/>
+          </a:bodyPr>
+          <a:lstStyle/>
+          <a:p>
+            <a:pPr algn="l">
+              <a:spcAft>
+                <a:spcPts val="0"/>
+              </a:spcAft>
+            </a:pPr>
+            <a:r>
+              <a:rPr sz="2100" b="1">
+                <a:solidFill>
+                  <a:srgbClr val="E8EEF5"/>
+                </a:solidFill>
+                <a:latin typeface="Consolas"/>
+              </a:rPr>
+              <a:t>1.0000</a:t>
+            </a:r>
+          </a:p>
+        </p:txBody>
+      </p:sp>
+      <p:sp>
+        <p:nvSpPr>
+          <p:cNvPr id="14" name="TextBox 13"/>
+          <p:cNvSpPr txBox="1"/>
+          <p:nvPr/>
+        </p:nvSpPr>
+        <p:spPr>
+          <a:xfrm>
+            <a:off x="9692640" y="2953512"/>
+            <a:ext cx="1554480" cy="548640"/>
+          </a:xfrm>
+          <a:prstGeom prst="rect">
+            <a:avLst/>
+          </a:prstGeom>
+          <a:noFill/>
+        </p:spPr>
+        <p:txBody>
+          <a:bodyPr wrap="square" lIns="0" rIns="0" tIns="0" bIns="0">
+            <a:spAutoFit/>
+          </a:bodyPr>
+          <a:lstStyle/>
+          <a:p>
+            <a:pPr algn="l">
+              <a:spcAft>
+                <a:spcPts val="0"/>
+              </a:spcAft>
+            </a:pPr>
+            <a:r>
+              <a:rPr sz="2100" b="1">
+                <a:solidFill>
+                  <a:srgbClr val="FF5747"/>
+                </a:solidFill>
+                <a:latin typeface="Consolas"/>
+              </a:rPr>
+              <a:t>0.9900</a:t>
+            </a:r>
+          </a:p>
+        </p:txBody>
+      </p:sp>
+      <p:sp>
+        <p:nvSpPr>
+          <p:cNvPr id="15" name="Rounded Rectangle 14"/>
+          <p:cNvSpPr/>
+          <p:nvPr/>
+        </p:nvSpPr>
+        <p:spPr>
+          <a:xfrm>
+            <a:off x="731520" y="3931920"/>
+            <a:ext cx="10698480" cy="1051560"/>
+          </a:xfrm>
+          <a:prstGeom prst="roundRect">
+            <a:avLst/>
+          </a:prstGeom>
+          <a:solidFill>
+            <a:srgbClr val="141C25"/>
+          </a:solidFill>
+          <a:ln w="9525">
+            <a:solidFill>
+              <a:srgbClr val="22303F"/>
+            </a:solidFill>
+          </a:ln>
+          <a:effectLst/>
+        </p:spPr>
+        <p:style>
+          <a:lnRef idx="1">
+            <a:schemeClr val="accent1"/>
+          </a:lnRef>
+          <a:fillRef idx="3">
+            <a:schemeClr val="accent1"/>
+          </a:fillRef>
+          <a:effectRef idx="2">
+            <a:schemeClr val="accent1"/>
+          </a:effectRef>
+          <a:fontRef idx="minor">
+            <a:schemeClr val="lt1"/>
+          </a:fontRef>
+        </p:style>
+        <p:txBody>
+          <a:bodyPr rtlCol="0" anchor="ctr"/>
+          <a:lstStyle/>
+          <a:p>
+            <a:pPr algn="ctr"/>
+          </a:p>
+        </p:txBody>
+      </p:sp>
+      <p:sp>
+        <p:nvSpPr>
+          <p:cNvPr id="16" name="TextBox 15"/>
+          <p:cNvSpPr txBox="1"/>
+          <p:nvPr/>
+        </p:nvSpPr>
+        <p:spPr>
+          <a:xfrm>
+            <a:off x="1005840" y="4114800"/>
+            <a:ext cx="4937760" cy="731520"/>
+          </a:xfrm>
+          <a:prstGeom prst="rect">
+            <a:avLst/>
+          </a:prstGeom>
+          <a:noFill/>
+        </p:spPr>
+        <p:txBody>
+          <a:bodyPr wrap="square" lIns="0" rIns="0" tIns="0" bIns="0">
+            <a:spAutoFit/>
+          </a:bodyPr>
+          <a:lstStyle/>
+          <a:p>
+            <a:pPr algn="l">
+              <a:spcAft>
+                <a:spcPts val="200"/>
+              </a:spcAft>
+            </a:pPr>
+            <a:r>
+              <a:rPr sz="1500" b="1">
+                <a:solidFill>
+                  <a:srgbClr val="E8EEF5"/>
+                </a:solidFill>
                 <a:latin typeface="Segoe UI"/>
               </a:rPr>
-              <a:t>These metrics come from a rebalanced benchmark, not production conditions.</a:t>
+              <a:t>GraphSAGE + XGBoost</a:t>
             </a:r>
           </a:p>
           <a:p>
             <a:pPr>
               <a:spcAft>
-                <a:spcPts val="1300"/>
-              </a:spcAft>
-            </a:pPr>
-            <a:r>
-              <a:rPr sz="1400" b="0">
+                <a:spcPts val="0"/>
+              </a:spcAft>
+            </a:pPr>
+            <a:r>
+              <a:rPr sz="1100" b="0">
                 <a:solidFill>
                   <a:srgbClr val="8BA0B6"/>
                 </a:solidFill>
                 <a:latin typeface="Segoe UI"/>
               </a:rPr>
-              <a:t>The held-out set runs at 8.09% fraud; the true base rate is 0.122%. At the real rate, false-positive economics change materially. Any pilot must be re-measured on live distributions.</a:t>
+              <a:t>the full pipeline</a:t>
+            </a:r>
+          </a:p>
+        </p:txBody>
+      </p:sp>
+      <p:sp>
+        <p:nvSpPr>
+          <p:cNvPr id="17" name="TextBox 16"/>
+          <p:cNvSpPr txBox="1"/>
+          <p:nvPr/>
+        </p:nvSpPr>
+        <p:spPr>
+          <a:xfrm>
+            <a:off x="6309360" y="4187952"/>
+            <a:ext cx="1554480" cy="548640"/>
+          </a:xfrm>
+          <a:prstGeom prst="rect">
+            <a:avLst/>
+          </a:prstGeom>
+          <a:noFill/>
+        </p:spPr>
+        <p:txBody>
+          <a:bodyPr wrap="square" lIns="0" rIns="0" tIns="0" bIns="0">
+            <a:spAutoFit/>
+          </a:bodyPr>
+          <a:lstStyle/>
+          <a:p>
+            <a:pPr algn="l">
+              <a:spcAft>
+                <a:spcPts val="0"/>
+              </a:spcAft>
+            </a:pPr>
+            <a:r>
+              <a:rPr sz="2100" b="1">
+                <a:solidFill>
+                  <a:srgbClr val="E8EEF5"/>
+                </a:solidFill>
+                <a:latin typeface="Consolas"/>
+              </a:rPr>
+              <a:t>0.9429</a:t>
+            </a:r>
+          </a:p>
+        </p:txBody>
+      </p:sp>
+      <p:sp>
+        <p:nvSpPr>
+          <p:cNvPr id="18" name="TextBox 17"/>
+          <p:cNvSpPr txBox="1"/>
+          <p:nvPr/>
+        </p:nvSpPr>
+        <p:spPr>
+          <a:xfrm>
+            <a:off x="8001000" y="4187952"/>
+            <a:ext cx="1554480" cy="548640"/>
+          </a:xfrm>
+          <a:prstGeom prst="rect">
+            <a:avLst/>
+          </a:prstGeom>
+          <a:noFill/>
+        </p:spPr>
+        <p:txBody>
+          <a:bodyPr wrap="square" lIns="0" rIns="0" tIns="0" bIns="0">
+            <a:spAutoFit/>
+          </a:bodyPr>
+          <a:lstStyle/>
+          <a:p>
+            <a:pPr algn="l">
+              <a:spcAft>
+                <a:spcPts val="0"/>
+              </a:spcAft>
+            </a:pPr>
+            <a:r>
+              <a:rPr sz="2100" b="1">
+                <a:solidFill>
+                  <a:srgbClr val="E8EEF5"/>
+                </a:solidFill>
+                <a:latin typeface="Consolas"/>
+              </a:rPr>
+              <a:t>0.9732</a:t>
+            </a:r>
+          </a:p>
+        </p:txBody>
+      </p:sp>
+      <p:sp>
+        <p:nvSpPr>
+          <p:cNvPr id="19" name="TextBox 18"/>
+          <p:cNvSpPr txBox="1"/>
+          <p:nvPr/>
+        </p:nvSpPr>
+        <p:spPr>
+          <a:xfrm>
+            <a:off x="9692640" y="4187952"/>
+            <a:ext cx="1554480" cy="548640"/>
+          </a:xfrm>
+          <a:prstGeom prst="rect">
+            <a:avLst/>
+          </a:prstGeom>
+          <a:noFill/>
+        </p:spPr>
+        <p:txBody>
+          <a:bodyPr wrap="square" lIns="0" rIns="0" tIns="0" bIns="0">
+            <a:spAutoFit/>
+          </a:bodyPr>
+          <a:lstStyle/>
+          <a:p>
+            <a:pPr algn="l">
+              <a:spcAft>
+                <a:spcPts val="0"/>
+              </a:spcAft>
+            </a:pPr>
+            <a:r>
+              <a:rPr sz="2100" b="1">
+                <a:solidFill>
+                  <a:srgbClr val="E8EEF5"/>
+                </a:solidFill>
+                <a:latin typeface="Consolas"/>
+              </a:rPr>
+              <a:t>0.9578</a:t>
+            </a:r>
+          </a:p>
+        </p:txBody>
+      </p:sp>
+      <p:sp>
+        <p:nvSpPr>
+          <p:cNvPr id="20" name="Rectangle 19"/>
+          <p:cNvSpPr/>
+          <p:nvPr/>
+        </p:nvSpPr>
+        <p:spPr>
+          <a:xfrm>
+            <a:off x="731520" y="5440680"/>
+            <a:ext cx="1371600" cy="28575"/>
+          </a:xfrm>
+          <a:prstGeom prst="rect">
+            <a:avLst/>
+          </a:prstGeom>
+          <a:solidFill>
+            <a:srgbClr val="FF5747"/>
+          </a:solidFill>
+          <a:ln>
+            <a:noFill/>
+          </a:ln>
+          <a:effectLst/>
+        </p:spPr>
+        <p:style>
+          <a:lnRef idx="1">
+            <a:schemeClr val="accent1"/>
+          </a:lnRef>
+          <a:fillRef idx="3">
+            <a:schemeClr val="accent1"/>
+          </a:fillRef>
+          <a:effectRef idx="2">
+            <a:schemeClr val="accent1"/>
+          </a:effectRef>
+          <a:fontRef idx="minor">
+            <a:schemeClr val="lt1"/>
+          </a:fontRef>
+        </p:style>
+        <p:txBody>
+          <a:bodyPr rtlCol="0" anchor="ctr"/>
+          <a:lstStyle/>
+          <a:p>
+            <a:pPr algn="ctr"/>
+          </a:p>
+        </p:txBody>
+      </p:sp>
+      <p:sp>
+        <p:nvSpPr>
+          <p:cNvPr id="21" name="TextBox 20"/>
+          <p:cNvSpPr txBox="1"/>
+          <p:nvPr/>
+        </p:nvSpPr>
+        <p:spPr>
+          <a:xfrm>
+            <a:off x="731520" y="5596128"/>
+            <a:ext cx="10698480" cy="731520"/>
+          </a:xfrm>
+          <a:prstGeom prst="rect">
+            <a:avLst/>
+          </a:prstGeom>
+          <a:noFill/>
+        </p:spPr>
+        <p:txBody>
+          <a:bodyPr wrap="square" lIns="0" rIns="0" tIns="0" bIns="0">
+            <a:spAutoFit/>
+          </a:bodyPr>
+          <a:lstStyle/>
+          <a:p>
+            <a:pPr algn="l">
+              <a:spcAft>
+                <a:spcPts val="400"/>
+              </a:spcAft>
+            </a:pPr>
+            <a:r>
+              <a:rPr sz="1600" b="1">
+                <a:solidFill>
+                  <a:srgbClr val="FF5747"/>
+                </a:solidFill>
+                <a:latin typeface="Segoe UI"/>
+              </a:rPr>
+              <a:t>A single line of SQL beats the model on this slice.</a:t>
             </a:r>
           </a:p>
           <a:p>
             <a:pPr>
               <a:spcAft>
-                <a:spcPts val="300"/>
-              </a:spcAft>
-            </a:pPr>
-            <a:r>
-              <a:rPr sz="1800" b="1">
-                <a:solidFill>
-                  <a:srgbClr val="E8EEF5"/>
+                <a:spcPts val="0"/>
+              </a:spcAft>
+            </a:pPr>
+            <a:r>
+              <a:rPr sz="1300" b="0">
+                <a:solidFill>
+                  <a:srgbClr val="8BA0B6"/>
                 </a:solidFill>
                 <a:latin typeface="Segoe UI"/>
               </a:rPr>
-              <a:t>Training undersamples the majority class.</a:t>
-            </a:r>
-          </a:p>
-          <a:p>
-            <a:pPr>
-              <a:spcAft>
-                <a:spcPts val="1300"/>
-              </a:spcAft>
-            </a:pPr>
-            <a:r>
-              <a:rPr sz="1400" b="0">
-                <a:solidFill>
-                  <a:srgbClr val="8BA0B6"/>
-                </a:solidFill>
-                <a:latin typeface="Segoe UI"/>
-              </a:rPr>
-              <a:t>A 0.1 fraud ratio with computed class weights. Standard practice for extreme imbalance, and a deliberate modelling choice rather than a hidden one.</a:t>
-            </a:r>
-          </a:p>
-          <a:p>
-            <a:pPr>
-              <a:spcAft>
-                <a:spcPts val="300"/>
-              </a:spcAft>
-            </a:pPr>
-            <a:r>
-              <a:rPr sz="1800" b="1">
-                <a:solidFill>
-                  <a:srgbClr val="E8EEF5"/>
-                </a:solidFill>
-                <a:latin typeface="Segoe UI"/>
-              </a:rPr>
-              <a:t>The dataset is public and synthetic-adjacent.</a:t>
-            </a:r>
-          </a:p>
-          <a:p>
-            <a:pPr>
-              <a:spcAft>
-                <a:spcPts val="1300"/>
-              </a:spcAft>
-            </a:pPr>
-            <a:r>
-              <a:rPr sz="1400" b="0">
-                <a:solidFill>
-                  <a:srgbClr val="8BA0B6"/>
-                </a:solidFill>
-                <a:latin typeface="Segoe UI"/>
-              </a:rPr>
-              <a:t>IBM TabFormer, Apache 2.0. It demonstrates the method; it is not a proxy for any institution's own fraud patterns.</a:t>
-            </a:r>
-          </a:p>
-          <a:p>
-            <a:pPr>
-              <a:spcAft>
-                <a:spcPts val="300"/>
-              </a:spcAft>
-            </a:pPr>
-            <a:r>
-              <a:rPr sz="1800" b="1">
-                <a:solidFill>
-                  <a:srgbClr val="E8EEF5"/>
-                </a:solidFill>
-                <a:latin typeface="Segoe UI"/>
-              </a:rPr>
-              <a:t>A production deployment needs the surrounding system.</a:t>
-            </a:r>
-          </a:p>
-          <a:p>
-            <a:pPr>
-              <a:spcAft>
-                <a:spcPts val="1300"/>
-              </a:spcAft>
-            </a:pPr>
-            <a:r>
-              <a:rPr sz="1400" b="0">
-                <a:solidFill>
-                  <a:srgbClr val="8BA0B6"/>
-                </a:solidFill>
-                <a:latin typeface="Segoe UI"/>
-              </a:rPr>
-              <a:t>Case management, feedback loops, model monitoring, champion/challenger and drift detection are all out of scope for this demo.</a:t>
+              <a:t>So any headline accuracy taken from it measures the dataset, not the method — and it is discoverable by anyone who groups the frauds by city. The demo’s own explainability said so all along: its top attribution is “merchant city”.</a:t>
             </a:r>
           </a:p>
         </p:txBody>
       </p:sp>
       <p:pic>
         <p:nvPicPr>
-          <p:cNvPr id="9" name="Picture 8" descr="dell-technologies-white.png"/>
+          <p:cNvPr id="22" name="Picture 21" descr="dell-technologies-white.png"/>
+          <p:cNvPicPr>
+            <a:picLocks noChangeAspect="1"/>
+          </p:cNvPicPr>
+          <p:nvPr/>
+        </p:nvPicPr>
+        <p:blipFill>
+          <a:blip r:embed="rId2"/>
+          <a:stretch>
+            <a:fillRect/>
+          </a:stretch>
+        </p:blipFill>
+        <p:spPr>
+          <a:xfrm>
+            <a:off x="731520" y="6309360"/>
+            <a:ext cx="1853801" cy="237744"/>
+          </a:xfrm>
+          <a:prstGeom prst="rect">
+            <a:avLst/>
+          </a:prstGeom>
+        </p:spPr>
+      </p:pic>
+      <p:sp>
+        <p:nvSpPr>
+          <p:cNvPr id="23" name="Rectangle 22"/>
+          <p:cNvSpPr/>
+          <p:nvPr/>
+        </p:nvSpPr>
+        <p:spPr>
+          <a:xfrm>
+            <a:off x="2786489" y="6303360"/>
+            <a:ext cx="9525" cy="249744"/>
+          </a:xfrm>
+          <a:prstGeom prst="rect">
+            <a:avLst/>
+          </a:prstGeom>
+          <a:solidFill>
+            <a:srgbClr val="22303F"/>
+          </a:solidFill>
+          <a:ln>
+            <a:noFill/>
+          </a:ln>
+          <a:effectLst/>
+        </p:spPr>
+        <p:style>
+          <a:lnRef idx="1">
+            <a:schemeClr val="accent1"/>
+          </a:lnRef>
+          <a:fillRef idx="3">
+            <a:schemeClr val="accent1"/>
+          </a:fillRef>
+          <a:effectRef idx="2">
+            <a:schemeClr val="accent1"/>
+          </a:effectRef>
+          <a:fontRef idx="minor">
+            <a:schemeClr val="lt1"/>
+          </a:fontRef>
+        </p:style>
+        <p:txBody>
+          <a:bodyPr rtlCol="0" anchor="ctr"/>
+          <a:lstStyle/>
+          <a:p>
+            <a:pPr algn="ctr"/>
+          </a:p>
+        </p:txBody>
+      </p:sp>
+      <p:pic>
+        <p:nvPicPr>
+          <p:cNvPr id="24" name="Picture 23" descr="nvidia-white.png"/>
           <p:cNvPicPr>
             <a:picLocks noChangeAspect="1"/>
           </p:cNvPicPr>
@@ -15212,6 +15955,30 @@
         </p:blipFill>
         <p:spPr>
           <a:xfrm>
+            <a:off x="2987657" y="6235660"/>
+            <a:ext cx="523117" cy="385145"/>
+          </a:xfrm>
+          <a:prstGeom prst="rect">
+            <a:avLst/>
+          </a:prstGeom>
+        </p:spPr>
+      </p:pic>
+      <p:pic>
+        <p:nvPicPr>
+          <p:cNvPr id="25" name="Picture 24" descr="dell-technologies-white.png"/>
+          <p:cNvPicPr>
+            <a:picLocks noChangeAspect="1"/>
+          </p:cNvPicPr>
+          <p:nvPr/>
+        </p:nvPicPr>
+        <p:blipFill>
+          <a:blip r:embed="rId2"/>
+          <a:stretch>
+            <a:fillRect/>
+          </a:stretch>
+        </p:blipFill>
+        <p:spPr>
+          <a:xfrm>
             <a:off x="731520" y="6309360"/>
             <a:ext cx="1853801" cy="237744"/>
           </a:xfrm>
@@ -15222,7 +15989,7 @@
       </p:pic>
       <p:sp>
         <p:nvSpPr>
-          <p:cNvPr id="10" name="Rectangle 9"/>
+          <p:cNvPr id="26" name="Rectangle 25"/>
           <p:cNvSpPr/>
           <p:nvPr/>
         </p:nvSpPr>
@@ -15266,14 +16033,14 @@
       </p:sp>
       <p:pic>
         <p:nvPicPr>
-          <p:cNvPr id="11" name="Picture 10" descr="nvidia-white.png"/>
+          <p:cNvPr id="27" name="Picture 26" descr="nvidia-white.png"/>
           <p:cNvPicPr>
             <a:picLocks noChangeAspect="1"/>
           </p:cNvPicPr>
           <p:nvPr/>
         </p:nvPicPr>
         <p:blipFill>
-          <a:blip r:embed="rId4"/>
+          <a:blip r:embed="rId3"/>
           <a:stretch>
             <a:fillRect/>
           </a:stretch>
@@ -15290,7 +16057,7 @@
       </p:pic>
       <p:sp>
         <p:nvSpPr>
-          <p:cNvPr id="12" name="TextBox 11"/>
+          <p:cNvPr id="28" name="TextBox 27"/>
           <p:cNvSpPr txBox="1"/>
           <p:nvPr/>
         </p:nvSpPr>
@@ -15322,7 +16089,7 @@
                 </a:solidFill>
                 <a:latin typeface="Consolas"/>
               </a:rPr>
-              <a:t>23 / 24</a:t>
+              <a:t>23 / 27</a:t>
             </a:r>
           </a:p>
         </p:txBody>
@@ -15511,7 +16278,7 @@
                 </a:solidFill>
                 <a:latin typeface="Consolas"/>
               </a:rPr>
-              <a:t>NEXT STEPS</a:t>
+              <a:t>THE HONEST MEASUREMENT</a:t>
             </a:r>
           </a:p>
         </p:txBody>
@@ -15550,7 +16317,7 @@
                 </a:solidFill>
                 <a:latin typeface="Segoe UI"/>
               </a:rPr>
-              <a:t>From demo to pilot</a:t>
+              <a:t>Tested where geography varies, the model wins</a:t>
             </a:r>
           </a:p>
         </p:txBody>
@@ -15607,8 +16374,8 @@
         </p:nvSpPr>
         <p:spPr>
           <a:xfrm>
-            <a:off x="731520" y="1965960"/>
-            <a:ext cx="10698480" cy="4114800"/>
+            <a:off x="731520" y="1874519"/>
+            <a:ext cx="10698480" cy="457200"/>
           </a:xfrm>
           <a:prstGeom prst="rect">
             <a:avLst/>
@@ -15623,129 +16390,17 @@
           <a:p>
             <a:pPr algn="l">
               <a:spcAft>
-                <a:spcPts val="300"/>
-              </a:spcAft>
-            </a:pPr>
-            <a:r>
-              <a:rPr sz="1800" b="1">
-                <a:solidFill>
-                  <a:srgbClr val="E8EEF5"/>
+                <a:spcPts val="0"/>
+              </a:spcAft>
+            </a:pPr>
+            <a:r>
+              <a:rPr sz="1500" b="0">
+                <a:solidFill>
+                  <a:srgbClr val="8BA0B6"/>
                 </a:solidFill>
                 <a:latin typeface="Segoe UI"/>
               </a:rPr>
-              <a:t>Run it on your data.</a:t>
-            </a:r>
-          </a:p>
-          <a:p>
-            <a:pPr>
-              <a:spcAft>
-                <a:spcPts val="1300"/>
-              </a:spcAft>
-            </a:pPr>
-            <a:r>
-              <a:rPr sz="1400" b="0">
-                <a:solidFill>
-                  <a:srgbClr val="8BA0B6"/>
-                </a:solidFill>
-                <a:latin typeface="Segoe UI"/>
-              </a:rPr>
-              <a:t>The pipeline is three commands and roughly a minute of compute for a dataset this size. The graph schema adapts to your transaction model.</a:t>
-            </a:r>
-          </a:p>
-          <a:p>
-            <a:pPr>
-              <a:spcAft>
-                <a:spcPts val="300"/>
-              </a:spcAft>
-            </a:pPr>
-            <a:r>
-              <a:rPr sz="1800" b="1">
-                <a:solidFill>
-                  <a:srgbClr val="E8EEF5"/>
-                </a:solidFill>
-                <a:latin typeface="Segoe UI"/>
-              </a:rPr>
-              <a:t>Choose the use case with the clearest data.</a:t>
-            </a:r>
-          </a:p>
-          <a:p>
-            <a:pPr>
-              <a:spcAft>
-                <a:spcPts val="1300"/>
-              </a:spcAft>
-            </a:pPr>
-            <a:r>
-              <a:rPr sz="1400" b="0">
-                <a:solidFill>
-                  <a:srgbClr val="8BA0B6"/>
-                </a:solidFill>
-                <a:latin typeface="Segoe UI"/>
-              </a:rPr>
-              <a:t>Payment fraud and merchant risk need only data an issuer or acquirer already holds. AML and identity graphs need more sourcing.</a:t>
-            </a:r>
-          </a:p>
-          <a:p>
-            <a:pPr>
-              <a:spcAft>
-                <a:spcPts val="300"/>
-              </a:spcAft>
-            </a:pPr>
-            <a:r>
-              <a:rPr sz="1800" b="1">
-                <a:solidFill>
-                  <a:srgbClr val="E8EEF5"/>
-                </a:solidFill>
-                <a:latin typeface="Segoe UI"/>
-              </a:rPr>
-              <a:t>Measure at the true base rate from day one.</a:t>
-            </a:r>
-          </a:p>
-          <a:p>
-            <a:pPr>
-              <a:spcAft>
-                <a:spcPts val="1300"/>
-              </a:spcAft>
-            </a:pPr>
-            <a:r>
-              <a:rPr sz="1400" b="0">
-                <a:solidFill>
-                  <a:srgbClr val="8BA0B6"/>
-                </a:solidFill>
-                <a:latin typeface="Segoe UI"/>
-              </a:rPr>
-              <a:t>Agree the false-positive budget with the fraud operations team before tuning anything.</a:t>
-            </a:r>
-          </a:p>
-          <a:p>
-            <a:pPr>
-              <a:spcAft>
-                <a:spcPts val="300"/>
-              </a:spcAft>
-            </a:pPr>
-            <a:r>
-              <a:rPr sz="1800" b="1">
-                <a:solidFill>
-                  <a:srgbClr val="E8EEF5"/>
-                </a:solidFill>
-                <a:latin typeface="Segoe UI"/>
-              </a:rPr>
-              <a:t>Deploy where the data lives.</a:t>
-            </a:r>
-          </a:p>
-          <a:p>
-            <a:pPr>
-              <a:spcAft>
-                <a:spcPts val="1300"/>
-              </a:spcAft>
-            </a:pPr>
-            <a:r>
-              <a:rPr sz="1400" b="0">
-                <a:solidFill>
-                  <a:srgbClr val="8BA0B6"/>
-                </a:solidFill>
-                <a:latin typeface="Segoe UI"/>
-              </a:rPr>
-              <a:t>One GB10 per site, or scale up the same containers on larger NVIDIA infrastructure — the stack is identical.</a:t>
+              <a:t>Same model, same features, same code — re-run against a period where fraud spans 730 cities instead of one.</a:t>
             </a:r>
           </a:p>
         </p:txBody>
@@ -15758,8 +16413,8 @@
         </p:nvSpPr>
         <p:spPr>
           <a:xfrm>
-            <a:off x="731520" y="5440680"/>
-            <a:ext cx="10698480" cy="777240"/>
+            <a:off x="731520" y="2606040"/>
+            <a:ext cx="5257800" cy="2331720"/>
           </a:xfrm>
           <a:prstGeom prst="roundRect">
             <a:avLst/>
@@ -15804,8 +16459,8 @@
         </p:nvSpPr>
         <p:spPr>
           <a:xfrm>
-            <a:off x="1051560" y="5650992"/>
-            <a:ext cx="10058400" cy="411480"/>
+            <a:off x="1051560" y="2788920"/>
+            <a:ext cx="4572000" cy="2011680"/>
           </a:xfrm>
           <a:prstGeom prst="rect">
             <a:avLst/>
@@ -15820,24 +16475,436 @@
           <a:p>
             <a:pPr algn="l">
               <a:spcAft>
+                <a:spcPts val="100"/>
+              </a:spcAft>
+            </a:pPr>
+            <a:r>
+              <a:rPr sz="2600" b="1">
+                <a:solidFill>
+                  <a:srgbClr val="E8EEF5"/>
+                </a:solidFill>
+                <a:latin typeface="Segoe UI"/>
+              </a:rPr>
+              <a:t>2019</a:t>
+            </a:r>
+          </a:p>
+          <a:p>
+            <a:pPr>
+              <a:spcAft>
+                <a:spcPts val="1000"/>
+              </a:spcAft>
+            </a:pPr>
+            <a:r>
+              <a:rPr sz="1200" b="0">
+                <a:solidFill>
+                  <a:srgbClr val="8BA0B6"/>
+                </a:solidFill>
+                <a:latin typeface="Segoe UI"/>
+              </a:rPr>
+              <a:t>standard benchmark</a:t>
+            </a:r>
+          </a:p>
+          <a:p>
+            <a:pPr>
+              <a:spcAft>
+                <a:spcPts val="1000"/>
+              </a:spcAft>
+            </a:pPr>
+            <a:r>
+              <a:rPr sz="1300" b="0">
+                <a:solidFill>
+                  <a:srgbClr val="8BA0B6"/>
+                </a:solidFill>
+                <a:latin typeface="Segoe UI"/>
+              </a:rPr>
+              <a:t>1  fraud cities in the test set</a:t>
+            </a:r>
+          </a:p>
+          <a:p>
+            <a:pPr>
+              <a:spcAft>
+                <a:spcPts val="400"/>
+              </a:spcAft>
+            </a:pPr>
+            <a:r>
+              <a:rPr sz="1500" b="0">
+                <a:solidFill>
+                  <a:srgbClr val="8BA0B6"/>
+                </a:solidFill>
+                <a:latin typeface="Consolas"/>
+              </a:rPr>
+              <a:t>best single rule        0.9900</a:t>
+            </a:r>
+          </a:p>
+          <a:p>
+            <a:pPr>
+              <a:spcAft>
+                <a:spcPts val="800"/>
+              </a:spcAft>
+            </a:pPr>
+            <a:r>
+              <a:rPr sz="1500" b="1">
+                <a:solidFill>
+                  <a:srgbClr val="FF5747"/>
+                </a:solidFill>
+                <a:latin typeface="Consolas"/>
+              </a:rPr>
+              <a:t>GNN + XGBoost           0.9578</a:t>
+            </a:r>
+          </a:p>
+          <a:p>
+            <a:pPr>
+              <a:spcAft>
                 <a:spcPts val="0"/>
               </a:spcAft>
             </a:pPr>
             <a:r>
+              <a:rPr sz="1300" b="1">
+                <a:solidFill>
+                  <a:srgbClr val="FF5747"/>
+                </a:solidFill>
+                <a:latin typeface="Consolas"/>
+              </a:rPr>
+              <a:t>RULE WINS</a:t>
+            </a:r>
+          </a:p>
+        </p:txBody>
+      </p:sp>
+      <p:sp>
+        <p:nvSpPr>
+          <p:cNvPr id="11" name="Rounded Rectangle 10"/>
+          <p:cNvSpPr/>
+          <p:nvPr/>
+        </p:nvSpPr>
+        <p:spPr>
+          <a:xfrm>
+            <a:off x="6355080" y="2606040"/>
+            <a:ext cx="5257800" cy="2331720"/>
+          </a:xfrm>
+          <a:prstGeom prst="roundRect">
+            <a:avLst/>
+          </a:prstGeom>
+          <a:solidFill>
+            <a:srgbClr val="141C25"/>
+          </a:solidFill>
+          <a:ln w="9525">
+            <a:solidFill>
+              <a:srgbClr val="22303F"/>
+            </a:solidFill>
+          </a:ln>
+          <a:effectLst/>
+        </p:spPr>
+        <p:style>
+          <a:lnRef idx="1">
+            <a:schemeClr val="accent1"/>
+          </a:lnRef>
+          <a:fillRef idx="3">
+            <a:schemeClr val="accent1"/>
+          </a:fillRef>
+          <a:effectRef idx="2">
+            <a:schemeClr val="accent1"/>
+          </a:effectRef>
+          <a:fontRef idx="minor">
+            <a:schemeClr val="lt1"/>
+          </a:fontRef>
+        </p:style>
+        <p:txBody>
+          <a:bodyPr rtlCol="0" anchor="ctr"/>
+          <a:lstStyle/>
+          <a:p>
+            <a:pPr algn="ctr"/>
+          </a:p>
+        </p:txBody>
+      </p:sp>
+      <p:sp>
+        <p:nvSpPr>
+          <p:cNvPr id="12" name="TextBox 11"/>
+          <p:cNvSpPr txBox="1"/>
+          <p:nvPr/>
+        </p:nvSpPr>
+        <p:spPr>
+          <a:xfrm>
+            <a:off x="6675120" y="2788920"/>
+            <a:ext cx="4572000" cy="2011680"/>
+          </a:xfrm>
+          <a:prstGeom prst="rect">
+            <a:avLst/>
+          </a:prstGeom>
+          <a:noFill/>
+        </p:spPr>
+        <p:txBody>
+          <a:bodyPr wrap="square" lIns="0" rIns="0" tIns="0" bIns="0">
+            <a:spAutoFit/>
+          </a:bodyPr>
+          <a:lstStyle/>
+          <a:p>
+            <a:pPr algn="l">
+              <a:spcAft>
+                <a:spcPts val="100"/>
+              </a:spcAft>
+            </a:pPr>
+            <a:r>
+              <a:rPr sz="2600" b="1">
+                <a:solidFill>
+                  <a:srgbClr val="E8EEF5"/>
+                </a:solidFill>
+                <a:latin typeface="Segoe UI"/>
+              </a:rPr>
+              <a:t>2015–2016</a:t>
+            </a:r>
+          </a:p>
+          <a:p>
+            <a:pPr>
+              <a:spcAft>
+                <a:spcPts val="1000"/>
+              </a:spcAft>
+            </a:pPr>
+            <a:r>
+              <a:rPr sz="1200" b="0">
+                <a:solidFill>
+                  <a:srgbClr val="8BA0B6"/>
+                </a:solidFill>
+                <a:latin typeface="Segoe UI"/>
+              </a:rPr>
+              <a:t>geography varies</a:t>
+            </a:r>
+          </a:p>
+          <a:p>
+            <a:pPr>
+              <a:spcAft>
+                <a:spcPts val="1000"/>
+              </a:spcAft>
+            </a:pPr>
+            <a:r>
               <a:rPr sz="1300" b="0">
                 <a:solidFill>
                   <a:srgbClr val="8BA0B6"/>
                 </a:solidFill>
                 <a:latin typeface="Segoe UI"/>
               </a:rPr>
-              <a:t>Built on the NVIDIA AI Blueprint for Financial Fraud Detection  ·  IBM TabFormer dataset (Apache 2.0)  ·  running on NVIDIA GB10</a:t>
+              <a:t>730  fraud cities in the test set</a:t>
+            </a:r>
+          </a:p>
+          <a:p>
+            <a:pPr>
+              <a:spcAft>
+                <a:spcPts val="400"/>
+              </a:spcAft>
+            </a:pPr>
+            <a:r>
+              <a:rPr sz="1500" b="0">
+                <a:solidFill>
+                  <a:srgbClr val="8BA0B6"/>
+                </a:solidFill>
+                <a:latin typeface="Consolas"/>
+              </a:rPr>
+              <a:t>best single rule        0.7568</a:t>
+            </a:r>
+          </a:p>
+          <a:p>
+            <a:pPr>
+              <a:spcAft>
+                <a:spcPts val="800"/>
+              </a:spcAft>
+            </a:pPr>
+            <a:r>
+              <a:rPr sz="1500" b="1">
+                <a:solidFill>
+                  <a:srgbClr val="76B900"/>
+                </a:solidFill>
+                <a:latin typeface="Consolas"/>
+              </a:rPr>
+              <a:t>GNN + XGBoost           0.7800</a:t>
+            </a:r>
+          </a:p>
+          <a:p>
+            <a:pPr>
+              <a:spcAft>
+                <a:spcPts val="0"/>
+              </a:spcAft>
+            </a:pPr>
+            <a:r>
+              <a:rPr sz="1300" b="1">
+                <a:solidFill>
+                  <a:srgbClr val="76B900"/>
+                </a:solidFill>
+                <a:latin typeface="Consolas"/>
+              </a:rPr>
+              <a:t>MODEL WINS</a:t>
+            </a:r>
+          </a:p>
+        </p:txBody>
+      </p:sp>
+      <p:sp>
+        <p:nvSpPr>
+          <p:cNvPr id="13" name="Rectangle 12"/>
+          <p:cNvSpPr/>
+          <p:nvPr/>
+        </p:nvSpPr>
+        <p:spPr>
+          <a:xfrm>
+            <a:off x="731520" y="5230368"/>
+            <a:ext cx="1371600" cy="28575"/>
+          </a:xfrm>
+          <a:prstGeom prst="rect">
+            <a:avLst/>
+          </a:prstGeom>
+          <a:solidFill>
+            <a:srgbClr val="76B900"/>
+          </a:solidFill>
+          <a:ln>
+            <a:noFill/>
+          </a:ln>
+          <a:effectLst/>
+        </p:spPr>
+        <p:style>
+          <a:lnRef idx="1">
+            <a:schemeClr val="accent1"/>
+          </a:lnRef>
+          <a:fillRef idx="3">
+            <a:schemeClr val="accent1"/>
+          </a:fillRef>
+          <a:effectRef idx="2">
+            <a:schemeClr val="accent1"/>
+          </a:effectRef>
+          <a:fontRef idx="minor">
+            <a:schemeClr val="lt1"/>
+          </a:fontRef>
+        </p:style>
+        <p:txBody>
+          <a:bodyPr rtlCol="0" anchor="ctr"/>
+          <a:lstStyle/>
+          <a:p>
+            <a:pPr algn="ctr"/>
+          </a:p>
+        </p:txBody>
+      </p:sp>
+      <p:sp>
+        <p:nvSpPr>
+          <p:cNvPr id="14" name="TextBox 13"/>
+          <p:cNvSpPr txBox="1"/>
+          <p:nvPr/>
+        </p:nvSpPr>
+        <p:spPr>
+          <a:xfrm>
+            <a:off x="731520" y="5394960"/>
+            <a:ext cx="10698480" cy="914400"/>
+          </a:xfrm>
+          <a:prstGeom prst="rect">
+            <a:avLst/>
+          </a:prstGeom>
+          <a:noFill/>
+        </p:spPr>
+        <p:txBody>
+          <a:bodyPr wrap="square" lIns="0" rIns="0" tIns="0" bIns="0">
+            <a:spAutoFit/>
+          </a:bodyPr>
+          <a:lstStyle/>
+          <a:p>
+            <a:pPr algn="l">
+              <a:spcAft>
+                <a:spcPts val="400"/>
+              </a:spcAft>
+            </a:pPr>
+            <a:r>
+              <a:rPr sz="1700" b="1">
+                <a:solidFill>
+                  <a:srgbClr val="76B900"/>
+                </a:solidFill>
+                <a:latin typeface="Segoe UI"/>
+              </a:rPr>
+              <a:t>Quote 0.78, not 0.96.</a:t>
+            </a:r>
+          </a:p>
+          <a:p>
+            <a:pPr>
+              <a:spcAft>
+                <a:spcPts val="0"/>
+              </a:spcAft>
+            </a:pPr>
+            <a:r>
+              <a:rPr sz="1300" b="0">
+                <a:solidFill>
+                  <a:srgbClr val="8BA0B6"/>
+                </a:solidFill>
+                <a:latin typeface="Segoe UI"/>
+              </a:rPr>
+              <a:t>On the honest split the model reaches F1 0.78 at precision 0.82, against 0.68 for the best single rule — a 14-point precision advantage no rules engine can reach, because the signal is not in any one column. A smaller headline and a far stronger claim.</a:t>
             </a:r>
           </a:p>
         </p:txBody>
       </p:sp>
       <p:pic>
         <p:nvPicPr>
-          <p:cNvPr id="11" name="Picture 10" descr="dell-technologies-white.png"/>
+          <p:cNvPr id="15" name="Picture 14" descr="dell-technologies-white.png"/>
+          <p:cNvPicPr>
+            <a:picLocks noChangeAspect="1"/>
+          </p:cNvPicPr>
+          <p:nvPr/>
+        </p:nvPicPr>
+        <p:blipFill>
+          <a:blip r:embed="rId2"/>
+          <a:stretch>
+            <a:fillRect/>
+          </a:stretch>
+        </p:blipFill>
+        <p:spPr>
+          <a:xfrm>
+            <a:off x="731520" y="6309360"/>
+            <a:ext cx="1853801" cy="237744"/>
+          </a:xfrm>
+          <a:prstGeom prst="rect">
+            <a:avLst/>
+          </a:prstGeom>
+        </p:spPr>
+      </p:pic>
+      <p:sp>
+        <p:nvSpPr>
+          <p:cNvPr id="16" name="Rectangle 15"/>
+          <p:cNvSpPr/>
+          <p:nvPr/>
+        </p:nvSpPr>
+        <p:spPr>
+          <a:xfrm>
+            <a:off x="2786489" y="6303360"/>
+            <a:ext cx="9525" cy="249744"/>
+          </a:xfrm>
+          <a:prstGeom prst="rect">
+            <a:avLst/>
+          </a:prstGeom>
+          <a:solidFill>
+            <a:srgbClr val="22303F"/>
+          </a:solidFill>
+          <a:ln>
+            <a:noFill/>
+          </a:ln>
+          <a:effectLst/>
+        </p:spPr>
+        <p:style>
+          <a:lnRef idx="1">
+            <a:schemeClr val="accent1"/>
+          </a:lnRef>
+          <a:fillRef idx="3">
+            <a:schemeClr val="accent1"/>
+          </a:fillRef>
+          <a:effectRef idx="2">
+            <a:schemeClr val="accent1"/>
+          </a:effectRef>
+          <a:fontRef idx="minor">
+            <a:schemeClr val="lt1"/>
+          </a:fontRef>
+        </p:style>
+        <p:txBody>
+          <a:bodyPr rtlCol="0" anchor="ctr"/>
+          <a:lstStyle/>
+          <a:p>
+            <a:pPr algn="ctr"/>
+          </a:p>
+        </p:txBody>
+      </p:sp>
+      <p:pic>
+        <p:nvPicPr>
+          <p:cNvPr id="17" name="Picture 16" descr="nvidia-white.png"/>
           <p:cNvPicPr>
             <a:picLocks noChangeAspect="1"/>
           </p:cNvPicPr>
@@ -15851,6 +16918,30 @@
         </p:blipFill>
         <p:spPr>
           <a:xfrm>
+            <a:off x="2987657" y="6235660"/>
+            <a:ext cx="523117" cy="385145"/>
+          </a:xfrm>
+          <a:prstGeom prst="rect">
+            <a:avLst/>
+          </a:prstGeom>
+        </p:spPr>
+      </p:pic>
+      <p:pic>
+        <p:nvPicPr>
+          <p:cNvPr id="18" name="Picture 17" descr="dell-technologies-white.png"/>
+          <p:cNvPicPr>
+            <a:picLocks noChangeAspect="1"/>
+          </p:cNvPicPr>
+          <p:nvPr/>
+        </p:nvPicPr>
+        <p:blipFill>
+          <a:blip r:embed="rId2"/>
+          <a:stretch>
+            <a:fillRect/>
+          </a:stretch>
+        </p:blipFill>
+        <p:spPr>
+          <a:xfrm>
             <a:off x="731520" y="6309360"/>
             <a:ext cx="1853801" cy="237744"/>
           </a:xfrm>
@@ -15861,7 +16952,7 @@
       </p:pic>
       <p:sp>
         <p:nvSpPr>
-          <p:cNvPr id="12" name="Rectangle 11"/>
+          <p:cNvPr id="19" name="Rectangle 18"/>
           <p:cNvSpPr/>
           <p:nvPr/>
         </p:nvSpPr>
@@ -15905,7 +16996,1517 @@
       </p:sp>
       <p:pic>
         <p:nvPicPr>
-          <p:cNvPr id="13" name="Picture 12" descr="nvidia-white.png"/>
+          <p:cNvPr id="20" name="Picture 19" descr="nvidia-white.png"/>
+          <p:cNvPicPr>
+            <a:picLocks noChangeAspect="1"/>
+          </p:cNvPicPr>
+          <p:nvPr/>
+        </p:nvPicPr>
+        <p:blipFill>
+          <a:blip r:embed="rId3"/>
+          <a:stretch>
+            <a:fillRect/>
+          </a:stretch>
+        </p:blipFill>
+        <p:spPr>
+          <a:xfrm>
+            <a:off x="2987657" y="6235660"/>
+            <a:ext cx="523117" cy="385145"/>
+          </a:xfrm>
+          <a:prstGeom prst="rect">
+            <a:avLst/>
+          </a:prstGeom>
+        </p:spPr>
+      </p:pic>
+      <p:sp>
+        <p:nvSpPr>
+          <p:cNvPr id="21" name="TextBox 20"/>
+          <p:cNvSpPr txBox="1"/>
+          <p:nvPr/>
+        </p:nvSpPr>
+        <p:spPr>
+          <a:xfrm>
+            <a:off x="10058400" y="6336792"/>
+            <a:ext cx="1371600" cy="274320"/>
+          </a:xfrm>
+          <a:prstGeom prst="rect">
+            <a:avLst/>
+          </a:prstGeom>
+          <a:noFill/>
+        </p:spPr>
+        <p:txBody>
+          <a:bodyPr wrap="square" lIns="0" rIns="0" tIns="0" bIns="0">
+            <a:spAutoFit/>
+          </a:bodyPr>
+          <a:lstStyle/>
+          <a:p>
+            <a:pPr algn="r">
+              <a:spcAft>
+                <a:spcPts val="0"/>
+              </a:spcAft>
+            </a:pPr>
+            <a:r>
+              <a:rPr sz="1000" b="0">
+                <a:solidFill>
+                  <a:srgbClr val="8BA0B6"/>
+                </a:solidFill>
+                <a:latin typeface="Consolas"/>
+              </a:rPr>
+              <a:t>24 / 27</a:t>
+            </a:r>
+          </a:p>
+        </p:txBody>
+      </p:sp>
+    </p:spTree>
+  </p:cSld>
+  <p:clrMapOvr>
+    <a:masterClrMapping/>
+  </p:clrMapOvr>
+</p:sld>
+</file>
+
+<file path=ppt/slides/slide25.xml><?xml version="1.0" encoding="utf-8"?>
+<p:sld xmlns:a="http://schemas.openxmlformats.org/drawingml/2006/main" xmlns:p="http://schemas.openxmlformats.org/presentationml/2006/main" xmlns:r="http://schemas.openxmlformats.org/officeDocument/2006/relationships">
+  <p:cSld>
+    <p:spTree>
+      <p:nvGrpSpPr>
+        <p:cNvPr id="1" name=""/>
+        <p:cNvGrpSpPr/>
+        <p:nvPr/>
+      </p:nvGrpSpPr>
+      <p:grpSpPr/>
+      <p:sp>
+        <p:nvSpPr>
+          <p:cNvPr id="2" name="Rectangle 1"/>
+          <p:cNvSpPr/>
+          <p:nvPr/>
+        </p:nvSpPr>
+        <p:spPr>
+          <a:xfrm>
+            <a:off x="0" y="0"/>
+            <a:ext cx="12191695" cy="6858000"/>
+          </a:xfrm>
+          <a:prstGeom prst="rect">
+            <a:avLst/>
+          </a:prstGeom>
+          <a:solidFill>
+            <a:srgbClr val="0A0E13"/>
+          </a:solidFill>
+          <a:ln>
+            <a:noFill/>
+          </a:ln>
+          <a:effectLst/>
+        </p:spPr>
+        <p:style>
+          <a:lnRef idx="1">
+            <a:schemeClr val="accent1"/>
+          </a:lnRef>
+          <a:fillRef idx="3">
+            <a:schemeClr val="accent1"/>
+          </a:fillRef>
+          <a:effectRef idx="2">
+            <a:schemeClr val="accent1"/>
+          </a:effectRef>
+          <a:fontRef idx="minor">
+            <a:schemeClr val="lt1"/>
+          </a:fontRef>
+        </p:style>
+        <p:txBody>
+          <a:bodyPr rtlCol="0" anchor="ctr"/>
+          <a:lstStyle/>
+          <a:p>
+            <a:pPr algn="ctr"/>
+          </a:p>
+        </p:txBody>
+      </p:sp>
+      <p:sp>
+        <p:nvSpPr>
+          <p:cNvPr id="3" name="Rectangle 2"/>
+          <p:cNvSpPr/>
+          <p:nvPr/>
+        </p:nvSpPr>
+        <p:spPr>
+          <a:xfrm>
+            <a:off x="0" y="0"/>
+            <a:ext cx="6095847" cy="38100"/>
+          </a:xfrm>
+          <a:prstGeom prst="rect">
+            <a:avLst/>
+          </a:prstGeom>
+          <a:solidFill>
+            <a:srgbClr val="0076CE"/>
+          </a:solidFill>
+          <a:ln>
+            <a:noFill/>
+          </a:ln>
+          <a:effectLst/>
+        </p:spPr>
+        <p:style>
+          <a:lnRef idx="1">
+            <a:schemeClr val="accent1"/>
+          </a:lnRef>
+          <a:fillRef idx="3">
+            <a:schemeClr val="accent1"/>
+          </a:fillRef>
+          <a:effectRef idx="2">
+            <a:schemeClr val="accent1"/>
+          </a:effectRef>
+          <a:fontRef idx="minor">
+            <a:schemeClr val="lt1"/>
+          </a:fontRef>
+        </p:style>
+        <p:txBody>
+          <a:bodyPr rtlCol="0" anchor="ctr"/>
+          <a:lstStyle/>
+          <a:p>
+            <a:pPr algn="ctr"/>
+          </a:p>
+        </p:txBody>
+      </p:sp>
+      <p:sp>
+        <p:nvSpPr>
+          <p:cNvPr id="4" name="Rectangle 3"/>
+          <p:cNvSpPr/>
+          <p:nvPr/>
+        </p:nvSpPr>
+        <p:spPr>
+          <a:xfrm>
+            <a:off x="6095847" y="0"/>
+            <a:ext cx="6095847" cy="38100"/>
+          </a:xfrm>
+          <a:prstGeom prst="rect">
+            <a:avLst/>
+          </a:prstGeom>
+          <a:solidFill>
+            <a:srgbClr val="76B900"/>
+          </a:solidFill>
+          <a:ln>
+            <a:noFill/>
+          </a:ln>
+          <a:effectLst/>
+        </p:spPr>
+        <p:style>
+          <a:lnRef idx="1">
+            <a:schemeClr val="accent1"/>
+          </a:lnRef>
+          <a:fillRef idx="3">
+            <a:schemeClr val="accent1"/>
+          </a:fillRef>
+          <a:effectRef idx="2">
+            <a:schemeClr val="accent1"/>
+          </a:effectRef>
+          <a:fontRef idx="minor">
+            <a:schemeClr val="lt1"/>
+          </a:fontRef>
+        </p:style>
+        <p:txBody>
+          <a:bodyPr rtlCol="0" anchor="ctr"/>
+          <a:lstStyle/>
+          <a:p>
+            <a:pPr algn="ctr"/>
+          </a:p>
+        </p:txBody>
+      </p:sp>
+      <p:sp>
+        <p:nvSpPr>
+          <p:cNvPr id="5" name="TextBox 4"/>
+          <p:cNvSpPr txBox="1"/>
+          <p:nvPr/>
+        </p:nvSpPr>
+        <p:spPr>
+          <a:xfrm>
+            <a:off x="731520" y="502920"/>
+            <a:ext cx="10698480" cy="274320"/>
+          </a:xfrm>
+          <a:prstGeom prst="rect">
+            <a:avLst/>
+          </a:prstGeom>
+          <a:noFill/>
+        </p:spPr>
+        <p:txBody>
+          <a:bodyPr wrap="square" lIns="0" rIns="0" tIns="0" bIns="0">
+            <a:spAutoFit/>
+          </a:bodyPr>
+          <a:lstStyle/>
+          <a:p>
+            <a:pPr algn="l">
+              <a:spcAft>
+                <a:spcPts val="400"/>
+              </a:spcAft>
+            </a:pPr>
+            <a:r>
+              <a:rPr sz="1100" b="1">
+                <a:solidFill>
+                  <a:srgbClr val="76B900"/>
+                </a:solidFill>
+                <a:latin typeface="Consolas"/>
+              </a:rPr>
+              <a:t>ON YOUR DATA</a:t>
+            </a:r>
+          </a:p>
+        </p:txBody>
+      </p:sp>
+      <p:sp>
+        <p:nvSpPr>
+          <p:cNvPr id="6" name="TextBox 5"/>
+          <p:cNvSpPr txBox="1"/>
+          <p:nvPr/>
+        </p:nvSpPr>
+        <p:spPr>
+          <a:xfrm>
+            <a:off x="731520" y="868680"/>
+            <a:ext cx="10698480" cy="640080"/>
+          </a:xfrm>
+          <a:prstGeom prst="rect">
+            <a:avLst/>
+          </a:prstGeom>
+          <a:noFill/>
+        </p:spPr>
+        <p:txBody>
+          <a:bodyPr wrap="square" lIns="0" rIns="0" tIns="0" bIns="0">
+            <a:spAutoFit/>
+          </a:bodyPr>
+          <a:lstStyle/>
+          <a:p>
+            <a:pPr algn="l">
+              <a:spcAft>
+                <a:spcPts val="0"/>
+              </a:spcAft>
+            </a:pPr>
+            <a:r>
+              <a:rPr sz="3000" b="1">
+                <a:solidFill>
+                  <a:srgbClr val="E8EEF5"/>
+                </a:solidFill>
+                <a:latin typeface="Segoe UI"/>
+              </a:rPr>
+              <a:t>What changes, in both directions</a:t>
+            </a:r>
+          </a:p>
+        </p:txBody>
+      </p:sp>
+      <p:sp>
+        <p:nvSpPr>
+          <p:cNvPr id="7" name="Rectangle 6"/>
+          <p:cNvSpPr/>
+          <p:nvPr/>
+        </p:nvSpPr>
+        <p:spPr>
+          <a:xfrm>
+            <a:off x="731520" y="1572768"/>
+            <a:ext cx="1371600" cy="28575"/>
+          </a:xfrm>
+          <a:prstGeom prst="rect">
+            <a:avLst/>
+          </a:prstGeom>
+          <a:solidFill>
+            <a:srgbClr val="76B900"/>
+          </a:solidFill>
+          <a:ln>
+            <a:noFill/>
+          </a:ln>
+          <a:effectLst/>
+        </p:spPr>
+        <p:style>
+          <a:lnRef idx="1">
+            <a:schemeClr val="accent1"/>
+          </a:lnRef>
+          <a:fillRef idx="3">
+            <a:schemeClr val="accent1"/>
+          </a:fillRef>
+          <a:effectRef idx="2">
+            <a:schemeClr val="accent1"/>
+          </a:effectRef>
+          <a:fontRef idx="minor">
+            <a:schemeClr val="lt1"/>
+          </a:fontRef>
+        </p:style>
+        <p:txBody>
+          <a:bodyPr rtlCol="0" anchor="ctr"/>
+          <a:lstStyle/>
+          <a:p>
+            <a:pPr algn="ctr"/>
+          </a:p>
+        </p:txBody>
+      </p:sp>
+      <p:sp>
+        <p:nvSpPr>
+          <p:cNvPr id="8" name="Rounded Rectangle 7"/>
+          <p:cNvSpPr/>
+          <p:nvPr/>
+        </p:nvSpPr>
+        <p:spPr>
+          <a:xfrm>
+            <a:off x="731520" y="1874519"/>
+            <a:ext cx="5257800" cy="3154680"/>
+          </a:xfrm>
+          <a:prstGeom prst="roundRect">
+            <a:avLst/>
+          </a:prstGeom>
+          <a:solidFill>
+            <a:srgbClr val="141C25"/>
+          </a:solidFill>
+          <a:ln w="9525">
+            <a:solidFill>
+              <a:srgbClr val="22303F"/>
+            </a:solidFill>
+          </a:ln>
+          <a:effectLst/>
+        </p:spPr>
+        <p:style>
+          <a:lnRef idx="1">
+            <a:schemeClr val="accent1"/>
+          </a:lnRef>
+          <a:fillRef idx="3">
+            <a:schemeClr val="accent1"/>
+          </a:fillRef>
+          <a:effectRef idx="2">
+            <a:schemeClr val="accent1"/>
+          </a:effectRef>
+          <a:fontRef idx="minor">
+            <a:schemeClr val="lt1"/>
+          </a:fontRef>
+        </p:style>
+        <p:txBody>
+          <a:bodyPr rtlCol="0" anchor="ctr"/>
+          <a:lstStyle/>
+          <a:p>
+            <a:pPr algn="ctr"/>
+          </a:p>
+        </p:txBody>
+      </p:sp>
+      <p:sp>
+        <p:nvSpPr>
+          <p:cNvPr id="9" name="TextBox 8"/>
+          <p:cNvSpPr txBox="1"/>
+          <p:nvPr/>
+        </p:nvSpPr>
+        <p:spPr>
+          <a:xfrm>
+            <a:off x="1051560" y="2057400"/>
+            <a:ext cx="4617720" cy="2834640"/>
+          </a:xfrm>
+          <a:prstGeom prst="rect">
+            <a:avLst/>
+          </a:prstGeom>
+          <a:noFill/>
+        </p:spPr>
+        <p:txBody>
+          <a:bodyPr wrap="square" lIns="0" rIns="0" tIns="0" bIns="0">
+            <a:spAutoFit/>
+          </a:bodyPr>
+          <a:lstStyle/>
+          <a:p>
+            <a:pPr algn="l">
+              <a:spcAft>
+                <a:spcPts val="1000"/>
+              </a:spcAft>
+            </a:pPr>
+            <a:r>
+              <a:rPr sz="1100" b="1">
+                <a:solidFill>
+                  <a:srgbClr val="76B900"/>
+                </a:solidFill>
+                <a:latin typeface="Consolas"/>
+              </a:rPr>
+              <a:t>WORKS IN YOUR FAVOUR</a:t>
+            </a:r>
+          </a:p>
+          <a:p>
+            <a:pPr>
+              <a:spcAft>
+                <a:spcPts val="200"/>
+              </a:spcAft>
+            </a:pPr>
+            <a:r>
+              <a:rPr sz="1350" b="1">
+                <a:solidFill>
+                  <a:srgbClr val="E8EEF5"/>
+                </a:solidFill>
+                <a:latin typeface="Segoe UI"/>
+              </a:rPr>
+              <a:t>Richer features</a:t>
+            </a:r>
+          </a:p>
+          <a:p>
+            <a:pPr>
+              <a:spcAft>
+                <a:spcPts val="900"/>
+              </a:spcAft>
+            </a:pPr>
+            <a:r>
+              <a:rPr sz="1150" b="0">
+                <a:solidFill>
+                  <a:srgbClr val="8BA0B6"/>
+                </a:solidFill>
+                <a:latin typeface="Segoe UI"/>
+              </a:rPr>
+              <a:t>Device, channel velocity, tenure, merchant risk history. No single column is a usable proxy.</a:t>
+            </a:r>
+          </a:p>
+          <a:p>
+            <a:pPr>
+              <a:spcAft>
+                <a:spcPts val="200"/>
+              </a:spcAft>
+            </a:pPr>
+            <a:r>
+              <a:rPr sz="1350" b="1">
+                <a:solidFill>
+                  <a:srgbClr val="E8EEF5"/>
+                </a:solidFill>
+                <a:latin typeface="Segoe UI"/>
+              </a:rPr>
+              <a:t>A real graph</a:t>
+            </a:r>
+          </a:p>
+          <a:p>
+            <a:pPr>
+              <a:spcAft>
+                <a:spcPts val="900"/>
+              </a:spcAft>
+            </a:pPr>
+            <a:r>
+              <a:rPr sz="1150" b="0">
+                <a:solidFill>
+                  <a:srgbClr val="8BA0B6"/>
+                </a:solidFill>
+                <a:latin typeface="Segoe UI"/>
+              </a:rPr>
+              <a:t>TabFormer gives card → transaction → merchant and nothing else. Shared devices, addresses and beneficiaries are what rules cannot express.</a:t>
+            </a:r>
+          </a:p>
+          <a:p>
+            <a:pPr>
+              <a:spcAft>
+                <a:spcPts val="200"/>
+              </a:spcAft>
+            </a:pPr>
+            <a:r>
+              <a:rPr sz="1350" b="1">
+                <a:solidFill>
+                  <a:srgbClr val="E8EEF5"/>
+                </a:solidFill>
+                <a:latin typeface="Segoe UI"/>
+              </a:rPr>
+              <a:t>The graph contribution here is understated</a:t>
+            </a:r>
+          </a:p>
+          <a:p>
+            <a:pPr>
+              <a:spcAft>
+                <a:spcPts val="900"/>
+              </a:spcAft>
+            </a:pPr>
+            <a:r>
+              <a:rPr sz="1150" b="0">
+                <a:solidFill>
+                  <a:srgbClr val="8BA0B6"/>
+                </a:solidFill>
+                <a:latin typeface="Segoe UI"/>
+              </a:rPr>
+              <a:t>This benchmark is close to the weakest possible showcase for a graph model.</a:t>
+            </a:r>
+          </a:p>
+        </p:txBody>
+      </p:sp>
+      <p:sp>
+        <p:nvSpPr>
+          <p:cNvPr id="10" name="Rounded Rectangle 9"/>
+          <p:cNvSpPr/>
+          <p:nvPr/>
+        </p:nvSpPr>
+        <p:spPr>
+          <a:xfrm>
+            <a:off x="6355080" y="1874519"/>
+            <a:ext cx="5257800" cy="3154680"/>
+          </a:xfrm>
+          <a:prstGeom prst="roundRect">
+            <a:avLst/>
+          </a:prstGeom>
+          <a:solidFill>
+            <a:srgbClr val="141C25"/>
+          </a:solidFill>
+          <a:ln w="9525">
+            <a:solidFill>
+              <a:srgbClr val="22303F"/>
+            </a:solidFill>
+          </a:ln>
+          <a:effectLst/>
+        </p:spPr>
+        <p:style>
+          <a:lnRef idx="1">
+            <a:schemeClr val="accent1"/>
+          </a:lnRef>
+          <a:fillRef idx="3">
+            <a:schemeClr val="accent1"/>
+          </a:fillRef>
+          <a:effectRef idx="2">
+            <a:schemeClr val="accent1"/>
+          </a:effectRef>
+          <a:fontRef idx="minor">
+            <a:schemeClr val="lt1"/>
+          </a:fontRef>
+        </p:style>
+        <p:txBody>
+          <a:bodyPr rtlCol="0" anchor="ctr"/>
+          <a:lstStyle/>
+          <a:p>
+            <a:pPr algn="ctr"/>
+          </a:p>
+        </p:txBody>
+      </p:sp>
+      <p:sp>
+        <p:nvSpPr>
+          <p:cNvPr id="11" name="TextBox 10"/>
+          <p:cNvSpPr txBox="1"/>
+          <p:nvPr/>
+        </p:nvSpPr>
+        <p:spPr>
+          <a:xfrm>
+            <a:off x="6675120" y="2057400"/>
+            <a:ext cx="4617720" cy="2834640"/>
+          </a:xfrm>
+          <a:prstGeom prst="rect">
+            <a:avLst/>
+          </a:prstGeom>
+          <a:noFill/>
+        </p:spPr>
+        <p:txBody>
+          <a:bodyPr wrap="square" lIns="0" rIns="0" tIns="0" bIns="0">
+            <a:spAutoFit/>
+          </a:bodyPr>
+          <a:lstStyle/>
+          <a:p>
+            <a:pPr algn="l">
+              <a:spcAft>
+                <a:spcPts val="1000"/>
+              </a:spcAft>
+            </a:pPr>
+            <a:r>
+              <a:rPr sz="1100" b="1">
+                <a:solidFill>
+                  <a:srgbClr val="FFA502"/>
+                </a:solidFill>
+                <a:latin typeface="Consolas"/>
+              </a:rPr>
+              <a:t>WORKS AGAINST YOU</a:t>
+            </a:r>
+          </a:p>
+          <a:p>
+            <a:pPr>
+              <a:spcAft>
+                <a:spcPts val="200"/>
+              </a:spcAft>
+            </a:pPr>
+            <a:r>
+              <a:rPr sz="1350" b="1">
+                <a:solidFill>
+                  <a:srgbClr val="E8EEF5"/>
+                </a:solidFill>
+                <a:latin typeface="Segoe UI"/>
+              </a:rPr>
+              <a:t>Late, partial labels</a:t>
+            </a:r>
+          </a:p>
+          <a:p>
+            <a:pPr>
+              <a:spcAft>
+                <a:spcPts val="900"/>
+              </a:spcAft>
+            </a:pPr>
+            <a:r>
+              <a:rPr sz="1150" b="0">
+                <a:solidFill>
+                  <a:srgbClr val="8BA0B6"/>
+                </a:solidFill>
+                <a:latin typeface="Segoe UI"/>
+              </a:rPr>
+              <a:t>Chargebacks settle over 60–90 days and confirmed fraud undercounts.</a:t>
+            </a:r>
+          </a:p>
+          <a:p>
+            <a:pPr>
+              <a:spcAft>
+                <a:spcPts val="200"/>
+              </a:spcAft>
+            </a:pPr>
+            <a:r>
+              <a:rPr sz="1350" b="1">
+                <a:solidFill>
+                  <a:srgbClr val="E8EEF5"/>
+                </a:solidFill>
+                <a:latin typeface="Segoe UI"/>
+              </a:rPr>
+              <a:t>Harsher imbalance</a:t>
+            </a:r>
+          </a:p>
+          <a:p>
+            <a:pPr>
+              <a:spcAft>
+                <a:spcPts val="900"/>
+              </a:spcAft>
+            </a:pPr>
+            <a:r>
+              <a:rPr sz="1150" b="0">
+                <a:solidFill>
+                  <a:srgbClr val="8BA0B6"/>
+                </a:solidFill>
+                <a:latin typeface="Segoe UI"/>
+              </a:rPr>
+              <a:t>Below the 0.122% base rate in this data.</a:t>
+            </a:r>
+          </a:p>
+          <a:p>
+            <a:pPr>
+              <a:spcAft>
+                <a:spcPts val="200"/>
+              </a:spcAft>
+            </a:pPr>
+            <a:r>
+              <a:rPr sz="1350" b="1">
+                <a:solidFill>
+                  <a:srgbClr val="E8EEF5"/>
+                </a:solidFill>
+                <a:latin typeface="Segoe UI"/>
+              </a:rPr>
+              <a:t>Continuous drift</a:t>
+            </a:r>
+          </a:p>
+          <a:p>
+            <a:pPr>
+              <a:spcAft>
+                <a:spcPts val="900"/>
+              </a:spcAft>
+            </a:pPr>
+            <a:r>
+              <a:rPr sz="1150" b="0">
+                <a:solidFill>
+                  <a:srgbClr val="8BA0B6"/>
+                </a:solidFill>
+                <a:latin typeface="Segoe UI"/>
+              </a:rPr>
+              <a:t>A model trained across a campaign boundary learns the campaign, which is exactly what the 2019 result shows.</a:t>
+            </a:r>
+          </a:p>
+        </p:txBody>
+      </p:sp>
+      <p:sp>
+        <p:nvSpPr>
+          <p:cNvPr id="12" name="Rectangle 11"/>
+          <p:cNvSpPr/>
+          <p:nvPr/>
+        </p:nvSpPr>
+        <p:spPr>
+          <a:xfrm>
+            <a:off x="731520" y="5285232"/>
+            <a:ext cx="1371600" cy="28575"/>
+          </a:xfrm>
+          <a:prstGeom prst="rect">
+            <a:avLst/>
+          </a:prstGeom>
+          <a:solidFill>
+            <a:srgbClr val="76B900"/>
+          </a:solidFill>
+          <a:ln>
+            <a:noFill/>
+          </a:ln>
+          <a:effectLst/>
+        </p:spPr>
+        <p:style>
+          <a:lnRef idx="1">
+            <a:schemeClr val="accent1"/>
+          </a:lnRef>
+          <a:fillRef idx="3">
+            <a:schemeClr val="accent1"/>
+          </a:fillRef>
+          <a:effectRef idx="2">
+            <a:schemeClr val="accent1"/>
+          </a:effectRef>
+          <a:fontRef idx="minor">
+            <a:schemeClr val="lt1"/>
+          </a:fontRef>
+        </p:style>
+        <p:txBody>
+          <a:bodyPr rtlCol="0" anchor="ctr"/>
+          <a:lstStyle/>
+          <a:p>
+            <a:pPr algn="ctr"/>
+          </a:p>
+        </p:txBody>
+      </p:sp>
+      <p:sp>
+        <p:nvSpPr>
+          <p:cNvPr id="13" name="TextBox 12"/>
+          <p:cNvSpPr txBox="1"/>
+          <p:nvPr/>
+        </p:nvSpPr>
+        <p:spPr>
+          <a:xfrm>
+            <a:off x="731520" y="5449824"/>
+            <a:ext cx="10698480" cy="914400"/>
+          </a:xfrm>
+          <a:prstGeom prst="rect">
+            <a:avLst/>
+          </a:prstGeom>
+          <a:noFill/>
+        </p:spPr>
+        <p:txBody>
+          <a:bodyPr wrap="square" lIns="0" rIns="0" tIns="0" bIns="0">
+            <a:spAutoFit/>
+          </a:bodyPr>
+          <a:lstStyle/>
+          <a:p>
+            <a:pPr algn="l">
+              <a:spcAft>
+                <a:spcPts val="400"/>
+              </a:spcAft>
+            </a:pPr>
+            <a:r>
+              <a:rPr sz="1700" b="1">
+                <a:solidFill>
+                  <a:srgbClr val="76B900"/>
+                </a:solidFill>
+                <a:latin typeface="Segoe UI"/>
+              </a:rPr>
+              <a:t>The metric that transfers: detection at fixed review capacity.</a:t>
+            </a:r>
+          </a:p>
+          <a:p>
+            <a:pPr>
+              <a:spcAft>
+                <a:spcPts val="0"/>
+              </a:spcAft>
+            </a:pPr>
+            <a:r>
+              <a:rPr sz="1300" b="0">
+                <a:solidFill>
+                  <a:srgbClr val="8BA0B6"/>
+                </a:solidFill>
+                <a:latin typeface="Segoe UI"/>
+              </a:rPr>
+              <a:t>Fraud teams buy on “my team can work 500 alerts a day — how much fraud do I catch?”. The live demo re-ranks an incumbent engine’s queue and reports how much fraud lands in the top N. Because it compares orderings inside that queue, the artefact above does not touch it — and a bank can validate it against its own historical alerts in about a week, deploying nothing.</a:t>
+            </a:r>
+          </a:p>
+        </p:txBody>
+      </p:sp>
+      <p:pic>
+        <p:nvPicPr>
+          <p:cNvPr id="14" name="Picture 13" descr="dell-technologies-white.png"/>
+          <p:cNvPicPr>
+            <a:picLocks noChangeAspect="1"/>
+          </p:cNvPicPr>
+          <p:nvPr/>
+        </p:nvPicPr>
+        <p:blipFill>
+          <a:blip r:embed="rId2"/>
+          <a:stretch>
+            <a:fillRect/>
+          </a:stretch>
+        </p:blipFill>
+        <p:spPr>
+          <a:xfrm>
+            <a:off x="731520" y="6309360"/>
+            <a:ext cx="1853801" cy="237744"/>
+          </a:xfrm>
+          <a:prstGeom prst="rect">
+            <a:avLst/>
+          </a:prstGeom>
+        </p:spPr>
+      </p:pic>
+      <p:sp>
+        <p:nvSpPr>
+          <p:cNvPr id="15" name="Rectangle 14"/>
+          <p:cNvSpPr/>
+          <p:nvPr/>
+        </p:nvSpPr>
+        <p:spPr>
+          <a:xfrm>
+            <a:off x="2786489" y="6303360"/>
+            <a:ext cx="9525" cy="249744"/>
+          </a:xfrm>
+          <a:prstGeom prst="rect">
+            <a:avLst/>
+          </a:prstGeom>
+          <a:solidFill>
+            <a:srgbClr val="22303F"/>
+          </a:solidFill>
+          <a:ln>
+            <a:noFill/>
+          </a:ln>
+          <a:effectLst/>
+        </p:spPr>
+        <p:style>
+          <a:lnRef idx="1">
+            <a:schemeClr val="accent1"/>
+          </a:lnRef>
+          <a:fillRef idx="3">
+            <a:schemeClr val="accent1"/>
+          </a:fillRef>
+          <a:effectRef idx="2">
+            <a:schemeClr val="accent1"/>
+          </a:effectRef>
+          <a:fontRef idx="minor">
+            <a:schemeClr val="lt1"/>
+          </a:fontRef>
+        </p:style>
+        <p:txBody>
+          <a:bodyPr rtlCol="0" anchor="ctr"/>
+          <a:lstStyle/>
+          <a:p>
+            <a:pPr algn="ctr"/>
+          </a:p>
+        </p:txBody>
+      </p:sp>
+      <p:pic>
+        <p:nvPicPr>
+          <p:cNvPr id="16" name="Picture 15" descr="nvidia-white.png"/>
+          <p:cNvPicPr>
+            <a:picLocks noChangeAspect="1"/>
+          </p:cNvPicPr>
+          <p:nvPr/>
+        </p:nvPicPr>
+        <p:blipFill>
+          <a:blip r:embed="rId3"/>
+          <a:stretch>
+            <a:fillRect/>
+          </a:stretch>
+        </p:blipFill>
+        <p:spPr>
+          <a:xfrm>
+            <a:off x="2987657" y="6235660"/>
+            <a:ext cx="523117" cy="385145"/>
+          </a:xfrm>
+          <a:prstGeom prst="rect">
+            <a:avLst/>
+          </a:prstGeom>
+        </p:spPr>
+      </p:pic>
+      <p:pic>
+        <p:nvPicPr>
+          <p:cNvPr id="17" name="Picture 16" descr="dell-technologies-white.png"/>
+          <p:cNvPicPr>
+            <a:picLocks noChangeAspect="1"/>
+          </p:cNvPicPr>
+          <p:nvPr/>
+        </p:nvPicPr>
+        <p:blipFill>
+          <a:blip r:embed="rId2"/>
+          <a:stretch>
+            <a:fillRect/>
+          </a:stretch>
+        </p:blipFill>
+        <p:spPr>
+          <a:xfrm>
+            <a:off x="731520" y="6309360"/>
+            <a:ext cx="1853801" cy="237744"/>
+          </a:xfrm>
+          <a:prstGeom prst="rect">
+            <a:avLst/>
+          </a:prstGeom>
+        </p:spPr>
+      </p:pic>
+      <p:sp>
+        <p:nvSpPr>
+          <p:cNvPr id="18" name="Rectangle 17"/>
+          <p:cNvSpPr/>
+          <p:nvPr/>
+        </p:nvSpPr>
+        <p:spPr>
+          <a:xfrm>
+            <a:off x="2786489" y="6303360"/>
+            <a:ext cx="9525" cy="249744"/>
+          </a:xfrm>
+          <a:prstGeom prst="rect">
+            <a:avLst/>
+          </a:prstGeom>
+          <a:solidFill>
+            <a:srgbClr val="22303F"/>
+          </a:solidFill>
+          <a:ln>
+            <a:noFill/>
+          </a:ln>
+          <a:effectLst/>
+        </p:spPr>
+        <p:style>
+          <a:lnRef idx="1">
+            <a:schemeClr val="accent1"/>
+          </a:lnRef>
+          <a:fillRef idx="3">
+            <a:schemeClr val="accent1"/>
+          </a:fillRef>
+          <a:effectRef idx="2">
+            <a:schemeClr val="accent1"/>
+          </a:effectRef>
+          <a:fontRef idx="minor">
+            <a:schemeClr val="lt1"/>
+          </a:fontRef>
+        </p:style>
+        <p:txBody>
+          <a:bodyPr rtlCol="0" anchor="ctr"/>
+          <a:lstStyle/>
+          <a:p>
+            <a:pPr algn="ctr"/>
+          </a:p>
+        </p:txBody>
+      </p:sp>
+      <p:pic>
+        <p:nvPicPr>
+          <p:cNvPr id="19" name="Picture 18" descr="nvidia-white.png"/>
+          <p:cNvPicPr>
+            <a:picLocks noChangeAspect="1"/>
+          </p:cNvPicPr>
+          <p:nvPr/>
+        </p:nvPicPr>
+        <p:blipFill>
+          <a:blip r:embed="rId3"/>
+          <a:stretch>
+            <a:fillRect/>
+          </a:stretch>
+        </p:blipFill>
+        <p:spPr>
+          <a:xfrm>
+            <a:off x="2987657" y="6235660"/>
+            <a:ext cx="523117" cy="385145"/>
+          </a:xfrm>
+          <a:prstGeom prst="rect">
+            <a:avLst/>
+          </a:prstGeom>
+        </p:spPr>
+      </p:pic>
+      <p:sp>
+        <p:nvSpPr>
+          <p:cNvPr id="20" name="TextBox 19"/>
+          <p:cNvSpPr txBox="1"/>
+          <p:nvPr/>
+        </p:nvSpPr>
+        <p:spPr>
+          <a:xfrm>
+            <a:off x="10058400" y="6336792"/>
+            <a:ext cx="1371600" cy="274320"/>
+          </a:xfrm>
+          <a:prstGeom prst="rect">
+            <a:avLst/>
+          </a:prstGeom>
+          <a:noFill/>
+        </p:spPr>
+        <p:txBody>
+          <a:bodyPr wrap="square" lIns="0" rIns="0" tIns="0" bIns="0">
+            <a:spAutoFit/>
+          </a:bodyPr>
+          <a:lstStyle/>
+          <a:p>
+            <a:pPr algn="r">
+              <a:spcAft>
+                <a:spcPts val="0"/>
+              </a:spcAft>
+            </a:pPr>
+            <a:r>
+              <a:rPr sz="1000" b="0">
+                <a:solidFill>
+                  <a:srgbClr val="8BA0B6"/>
+                </a:solidFill>
+                <a:latin typeface="Consolas"/>
+              </a:rPr>
+              <a:t>25 / 27</a:t>
+            </a:r>
+          </a:p>
+        </p:txBody>
+      </p:sp>
+    </p:spTree>
+  </p:cSld>
+  <p:clrMapOvr>
+    <a:masterClrMapping/>
+  </p:clrMapOvr>
+</p:sld>
+</file>
+
+<file path=ppt/slides/slide26.xml><?xml version="1.0" encoding="utf-8"?>
+<p:sld xmlns:a="http://schemas.openxmlformats.org/drawingml/2006/main" xmlns:p="http://schemas.openxmlformats.org/presentationml/2006/main" xmlns:r="http://schemas.openxmlformats.org/officeDocument/2006/relationships">
+  <p:cSld>
+    <p:spTree>
+      <p:nvGrpSpPr>
+        <p:cNvPr id="1" name=""/>
+        <p:cNvGrpSpPr/>
+        <p:nvPr/>
+      </p:nvGrpSpPr>
+      <p:grpSpPr/>
+      <p:sp>
+        <p:nvSpPr>
+          <p:cNvPr id="2" name="Rectangle 1"/>
+          <p:cNvSpPr/>
+          <p:nvPr/>
+        </p:nvSpPr>
+        <p:spPr>
+          <a:xfrm>
+            <a:off x="0" y="0"/>
+            <a:ext cx="12191695" cy="6858000"/>
+          </a:xfrm>
+          <a:prstGeom prst="rect">
+            <a:avLst/>
+          </a:prstGeom>
+          <a:solidFill>
+            <a:srgbClr val="0A0E13"/>
+          </a:solidFill>
+          <a:ln>
+            <a:noFill/>
+          </a:ln>
+          <a:effectLst/>
+        </p:spPr>
+        <p:style>
+          <a:lnRef idx="1">
+            <a:schemeClr val="accent1"/>
+          </a:lnRef>
+          <a:fillRef idx="3">
+            <a:schemeClr val="accent1"/>
+          </a:fillRef>
+          <a:effectRef idx="2">
+            <a:schemeClr val="accent1"/>
+          </a:effectRef>
+          <a:fontRef idx="minor">
+            <a:schemeClr val="lt1"/>
+          </a:fontRef>
+        </p:style>
+        <p:txBody>
+          <a:bodyPr rtlCol="0" anchor="ctr"/>
+          <a:lstStyle/>
+          <a:p>
+            <a:pPr algn="ctr"/>
+          </a:p>
+        </p:txBody>
+      </p:sp>
+      <p:sp>
+        <p:nvSpPr>
+          <p:cNvPr id="3" name="Rectangle 2"/>
+          <p:cNvSpPr/>
+          <p:nvPr/>
+        </p:nvSpPr>
+        <p:spPr>
+          <a:xfrm>
+            <a:off x="0" y="0"/>
+            <a:ext cx="6095847" cy="38100"/>
+          </a:xfrm>
+          <a:prstGeom prst="rect">
+            <a:avLst/>
+          </a:prstGeom>
+          <a:solidFill>
+            <a:srgbClr val="0076CE"/>
+          </a:solidFill>
+          <a:ln>
+            <a:noFill/>
+          </a:ln>
+          <a:effectLst/>
+        </p:spPr>
+        <p:style>
+          <a:lnRef idx="1">
+            <a:schemeClr val="accent1"/>
+          </a:lnRef>
+          <a:fillRef idx="3">
+            <a:schemeClr val="accent1"/>
+          </a:fillRef>
+          <a:effectRef idx="2">
+            <a:schemeClr val="accent1"/>
+          </a:effectRef>
+          <a:fontRef idx="minor">
+            <a:schemeClr val="lt1"/>
+          </a:fontRef>
+        </p:style>
+        <p:txBody>
+          <a:bodyPr rtlCol="0" anchor="ctr"/>
+          <a:lstStyle/>
+          <a:p>
+            <a:pPr algn="ctr"/>
+          </a:p>
+        </p:txBody>
+      </p:sp>
+      <p:sp>
+        <p:nvSpPr>
+          <p:cNvPr id="4" name="Rectangle 3"/>
+          <p:cNvSpPr/>
+          <p:nvPr/>
+        </p:nvSpPr>
+        <p:spPr>
+          <a:xfrm>
+            <a:off x="6095847" y="0"/>
+            <a:ext cx="6095847" cy="38100"/>
+          </a:xfrm>
+          <a:prstGeom prst="rect">
+            <a:avLst/>
+          </a:prstGeom>
+          <a:solidFill>
+            <a:srgbClr val="76B900"/>
+          </a:solidFill>
+          <a:ln>
+            <a:noFill/>
+          </a:ln>
+          <a:effectLst/>
+        </p:spPr>
+        <p:style>
+          <a:lnRef idx="1">
+            <a:schemeClr val="accent1"/>
+          </a:lnRef>
+          <a:fillRef idx="3">
+            <a:schemeClr val="accent1"/>
+          </a:fillRef>
+          <a:effectRef idx="2">
+            <a:schemeClr val="accent1"/>
+          </a:effectRef>
+          <a:fontRef idx="minor">
+            <a:schemeClr val="lt1"/>
+          </a:fontRef>
+        </p:style>
+        <p:txBody>
+          <a:bodyPr rtlCol="0" anchor="ctr"/>
+          <a:lstStyle/>
+          <a:p>
+            <a:pPr algn="ctr"/>
+          </a:p>
+        </p:txBody>
+      </p:sp>
+      <p:sp>
+        <p:nvSpPr>
+          <p:cNvPr id="5" name="TextBox 4"/>
+          <p:cNvSpPr txBox="1"/>
+          <p:nvPr/>
+        </p:nvSpPr>
+        <p:spPr>
+          <a:xfrm>
+            <a:off x="731520" y="502920"/>
+            <a:ext cx="10698480" cy="274320"/>
+          </a:xfrm>
+          <a:prstGeom prst="rect">
+            <a:avLst/>
+          </a:prstGeom>
+          <a:noFill/>
+        </p:spPr>
+        <p:txBody>
+          <a:bodyPr wrap="square" lIns="0" rIns="0" tIns="0" bIns="0">
+            <a:spAutoFit/>
+          </a:bodyPr>
+          <a:lstStyle/>
+          <a:p>
+            <a:pPr algn="l">
+              <a:spcAft>
+                <a:spcPts val="400"/>
+              </a:spcAft>
+            </a:pPr>
+            <a:r>
+              <a:rPr sz="1100" b="1">
+                <a:solidFill>
+                  <a:srgbClr val="76B900"/>
+                </a:solidFill>
+                <a:latin typeface="Consolas"/>
+              </a:rPr>
+              <a:t>WHAT WE ARE NOT CLAIMING</a:t>
+            </a:r>
+          </a:p>
+        </p:txBody>
+      </p:sp>
+      <p:sp>
+        <p:nvSpPr>
+          <p:cNvPr id="6" name="TextBox 5"/>
+          <p:cNvSpPr txBox="1"/>
+          <p:nvPr/>
+        </p:nvSpPr>
+        <p:spPr>
+          <a:xfrm>
+            <a:off x="731520" y="868680"/>
+            <a:ext cx="10698480" cy="640080"/>
+          </a:xfrm>
+          <a:prstGeom prst="rect">
+            <a:avLst/>
+          </a:prstGeom>
+          <a:noFill/>
+        </p:spPr>
+        <p:txBody>
+          <a:bodyPr wrap="square" lIns="0" rIns="0" tIns="0" bIns="0">
+            <a:spAutoFit/>
+          </a:bodyPr>
+          <a:lstStyle/>
+          <a:p>
+            <a:pPr algn="l">
+              <a:spcAft>
+                <a:spcPts val="0"/>
+              </a:spcAft>
+            </a:pPr>
+            <a:r>
+              <a:rPr sz="3000" b="1">
+                <a:solidFill>
+                  <a:srgbClr val="E8EEF5"/>
+                </a:solidFill>
+                <a:latin typeface="Segoe UI"/>
+              </a:rPr>
+              <a:t>The caveats, stated first</a:t>
+            </a:r>
+          </a:p>
+        </p:txBody>
+      </p:sp>
+      <p:sp>
+        <p:nvSpPr>
+          <p:cNvPr id="7" name="Rectangle 6"/>
+          <p:cNvSpPr/>
+          <p:nvPr/>
+        </p:nvSpPr>
+        <p:spPr>
+          <a:xfrm>
+            <a:off x="731520" y="1572768"/>
+            <a:ext cx="1371600" cy="28575"/>
+          </a:xfrm>
+          <a:prstGeom prst="rect">
+            <a:avLst/>
+          </a:prstGeom>
+          <a:solidFill>
+            <a:srgbClr val="76B900"/>
+          </a:solidFill>
+          <a:ln>
+            <a:noFill/>
+          </a:ln>
+          <a:effectLst/>
+        </p:spPr>
+        <p:style>
+          <a:lnRef idx="1">
+            <a:schemeClr val="accent1"/>
+          </a:lnRef>
+          <a:fillRef idx="3">
+            <a:schemeClr val="accent1"/>
+          </a:fillRef>
+          <a:effectRef idx="2">
+            <a:schemeClr val="accent1"/>
+          </a:effectRef>
+          <a:fontRef idx="minor">
+            <a:schemeClr val="lt1"/>
+          </a:fontRef>
+        </p:style>
+        <p:txBody>
+          <a:bodyPr rtlCol="0" anchor="ctr"/>
+          <a:lstStyle/>
+          <a:p>
+            <a:pPr algn="ctr"/>
+          </a:p>
+        </p:txBody>
+      </p:sp>
+      <p:sp>
+        <p:nvSpPr>
+          <p:cNvPr id="8" name="TextBox 7"/>
+          <p:cNvSpPr txBox="1"/>
+          <p:nvPr/>
+        </p:nvSpPr>
+        <p:spPr>
+          <a:xfrm>
+            <a:off x="731520" y="1965960"/>
+            <a:ext cx="10698480" cy="4114800"/>
+          </a:xfrm>
+          <a:prstGeom prst="rect">
+            <a:avLst/>
+          </a:prstGeom>
+          <a:noFill/>
+        </p:spPr>
+        <p:txBody>
+          <a:bodyPr wrap="square" lIns="0" rIns="0" tIns="0" bIns="0">
+            <a:spAutoFit/>
+          </a:bodyPr>
+          <a:lstStyle/>
+          <a:p>
+            <a:pPr algn="l">
+              <a:spcAft>
+                <a:spcPts val="300"/>
+              </a:spcAft>
+            </a:pPr>
+            <a:r>
+              <a:rPr sz="1800" b="1">
+                <a:solidFill>
+                  <a:srgbClr val="E8EEF5"/>
+                </a:solidFill>
+                <a:latin typeface="Segoe UI"/>
+              </a:rPr>
+              <a:t>These metrics come from a rebalanced benchmark, not production conditions.</a:t>
+            </a:r>
+          </a:p>
+          <a:p>
+            <a:pPr>
+              <a:spcAft>
+                <a:spcPts val="1300"/>
+              </a:spcAft>
+            </a:pPr>
+            <a:r>
+              <a:rPr sz="1400" b="0">
+                <a:solidFill>
+                  <a:srgbClr val="8BA0B6"/>
+                </a:solidFill>
+                <a:latin typeface="Segoe UI"/>
+              </a:rPr>
+              <a:t>The held-out set runs at 8.09% fraud; the true base rate is 0.122%. At the real rate, false-positive economics change materially. Any pilot must be re-measured on live distributions.</a:t>
+            </a:r>
+          </a:p>
+          <a:p>
+            <a:pPr>
+              <a:spcAft>
+                <a:spcPts val="300"/>
+              </a:spcAft>
+            </a:pPr>
+            <a:r>
+              <a:rPr sz="1800" b="1">
+                <a:solidFill>
+                  <a:srgbClr val="E8EEF5"/>
+                </a:solidFill>
+                <a:latin typeface="Segoe UI"/>
+              </a:rPr>
+              <a:t>Training undersamples the majority class.</a:t>
+            </a:r>
+          </a:p>
+          <a:p>
+            <a:pPr>
+              <a:spcAft>
+                <a:spcPts val="1300"/>
+              </a:spcAft>
+            </a:pPr>
+            <a:r>
+              <a:rPr sz="1400" b="0">
+                <a:solidFill>
+                  <a:srgbClr val="8BA0B6"/>
+                </a:solidFill>
+                <a:latin typeface="Segoe UI"/>
+              </a:rPr>
+              <a:t>A 0.1 fraud ratio with computed class weights. Standard practice for extreme imbalance, and a deliberate modelling choice rather than a hidden one.</a:t>
+            </a:r>
+          </a:p>
+          <a:p>
+            <a:pPr>
+              <a:spcAft>
+                <a:spcPts val="300"/>
+              </a:spcAft>
+            </a:pPr>
+            <a:r>
+              <a:rPr sz="1800" b="1">
+                <a:solidFill>
+                  <a:srgbClr val="E8EEF5"/>
+                </a:solidFill>
+                <a:latin typeface="Segoe UI"/>
+              </a:rPr>
+              <a:t>The dataset is public, synthetic-adjacent, and carries a geographic artefact.</a:t>
+            </a:r>
+          </a:p>
+          <a:p>
+            <a:pPr>
+              <a:spcAft>
+                <a:spcPts val="1300"/>
+              </a:spcAft>
+            </a:pPr>
+            <a:r>
+              <a:rPr sz="1400" b="0">
+                <a:solidFill>
+                  <a:srgbClr val="8BA0B6"/>
+                </a:solidFill>
+                <a:latin typeface="Segoe UI"/>
+              </a:rPr>
+              <a:t>IBM TabFormer, Apache 2.0. Every fraud in the benchmark's test slice sits in one city, so a one-line rule scores F1 0.99 there. Measured on a period where geography varies, the model reaches 0.78 and beats the best rule — see the three preceding slides.</a:t>
+            </a:r>
+          </a:p>
+          <a:p>
+            <a:pPr>
+              <a:spcAft>
+                <a:spcPts val="300"/>
+              </a:spcAft>
+            </a:pPr>
+            <a:r>
+              <a:rPr sz="1800" b="1">
+                <a:solidFill>
+                  <a:srgbClr val="E8EEF5"/>
+                </a:solidFill>
+                <a:latin typeface="Segoe UI"/>
+              </a:rPr>
+              <a:t>A production deployment needs the surrounding system.</a:t>
+            </a:r>
+          </a:p>
+          <a:p>
+            <a:pPr>
+              <a:spcAft>
+                <a:spcPts val="1300"/>
+              </a:spcAft>
+            </a:pPr>
+            <a:r>
+              <a:rPr sz="1400" b="0">
+                <a:solidFill>
+                  <a:srgbClr val="8BA0B6"/>
+                </a:solidFill>
+                <a:latin typeface="Segoe UI"/>
+              </a:rPr>
+              <a:t>Case management, feedback loops, model monitoring, champion/challenger and drift detection are all out of scope for this demo.</a:t>
+            </a:r>
+          </a:p>
+        </p:txBody>
+      </p:sp>
+      <p:pic>
+        <p:nvPicPr>
+          <p:cNvPr id="9" name="Picture 8" descr="dell-technologies-white.png"/>
+          <p:cNvPicPr>
+            <a:picLocks noChangeAspect="1"/>
+          </p:cNvPicPr>
+          <p:nvPr/>
+        </p:nvPicPr>
+        <p:blipFill>
+          <a:blip r:embed="rId3"/>
+          <a:stretch>
+            <a:fillRect/>
+          </a:stretch>
+        </p:blipFill>
+        <p:spPr>
+          <a:xfrm>
+            <a:off x="731520" y="6309360"/>
+            <a:ext cx="1853801" cy="237744"/>
+          </a:xfrm>
+          <a:prstGeom prst="rect">
+            <a:avLst/>
+          </a:prstGeom>
+        </p:spPr>
+      </p:pic>
+      <p:sp>
+        <p:nvSpPr>
+          <p:cNvPr id="10" name="Rectangle 9"/>
+          <p:cNvSpPr/>
+          <p:nvPr/>
+        </p:nvSpPr>
+        <p:spPr>
+          <a:xfrm>
+            <a:off x="2786489" y="6303360"/>
+            <a:ext cx="9525" cy="249744"/>
+          </a:xfrm>
+          <a:prstGeom prst="rect">
+            <a:avLst/>
+          </a:prstGeom>
+          <a:solidFill>
+            <a:srgbClr val="22303F"/>
+          </a:solidFill>
+          <a:ln>
+            <a:noFill/>
+          </a:ln>
+          <a:effectLst/>
+        </p:spPr>
+        <p:style>
+          <a:lnRef idx="1">
+            <a:schemeClr val="accent1"/>
+          </a:lnRef>
+          <a:fillRef idx="3">
+            <a:schemeClr val="accent1"/>
+          </a:fillRef>
+          <a:effectRef idx="2">
+            <a:schemeClr val="accent1"/>
+          </a:effectRef>
+          <a:fontRef idx="minor">
+            <a:schemeClr val="lt1"/>
+          </a:fontRef>
+        </p:style>
+        <p:txBody>
+          <a:bodyPr rtlCol="0" anchor="ctr"/>
+          <a:lstStyle/>
+          <a:p>
+            <a:pPr algn="ctr"/>
+          </a:p>
+        </p:txBody>
+      </p:sp>
+      <p:pic>
+        <p:nvPicPr>
+          <p:cNvPr id="11" name="Picture 10" descr="nvidia-white.png"/>
           <p:cNvPicPr>
             <a:picLocks noChangeAspect="1"/>
           </p:cNvPicPr>
@@ -15929,7 +18530,7 @@
       </p:pic>
       <p:sp>
         <p:nvSpPr>
-          <p:cNvPr id="14" name="TextBox 13"/>
+          <p:cNvPr id="12" name="TextBox 11"/>
           <p:cNvSpPr txBox="1"/>
           <p:nvPr/>
         </p:nvSpPr>
@@ -15961,7 +18562,646 @@
                 </a:solidFill>
                 <a:latin typeface="Consolas"/>
               </a:rPr>
-              <a:t>24 / 24</a:t>
+              <a:t>26 / 27</a:t>
+            </a:r>
+          </a:p>
+        </p:txBody>
+      </p:sp>
+    </p:spTree>
+  </p:cSld>
+  <p:clrMapOvr>
+    <a:masterClrMapping/>
+  </p:clrMapOvr>
+</p:sld>
+</file>
+
+<file path=ppt/slides/slide27.xml><?xml version="1.0" encoding="utf-8"?>
+<p:sld xmlns:a="http://schemas.openxmlformats.org/drawingml/2006/main" xmlns:p="http://schemas.openxmlformats.org/presentationml/2006/main" xmlns:r="http://schemas.openxmlformats.org/officeDocument/2006/relationships">
+  <p:cSld>
+    <p:spTree>
+      <p:nvGrpSpPr>
+        <p:cNvPr id="1" name=""/>
+        <p:cNvGrpSpPr/>
+        <p:nvPr/>
+      </p:nvGrpSpPr>
+      <p:grpSpPr/>
+      <p:sp>
+        <p:nvSpPr>
+          <p:cNvPr id="2" name="Rectangle 1"/>
+          <p:cNvSpPr/>
+          <p:nvPr/>
+        </p:nvSpPr>
+        <p:spPr>
+          <a:xfrm>
+            <a:off x="0" y="0"/>
+            <a:ext cx="12191695" cy="6858000"/>
+          </a:xfrm>
+          <a:prstGeom prst="rect">
+            <a:avLst/>
+          </a:prstGeom>
+          <a:solidFill>
+            <a:srgbClr val="0A0E13"/>
+          </a:solidFill>
+          <a:ln>
+            <a:noFill/>
+          </a:ln>
+          <a:effectLst/>
+        </p:spPr>
+        <p:style>
+          <a:lnRef idx="1">
+            <a:schemeClr val="accent1"/>
+          </a:lnRef>
+          <a:fillRef idx="3">
+            <a:schemeClr val="accent1"/>
+          </a:fillRef>
+          <a:effectRef idx="2">
+            <a:schemeClr val="accent1"/>
+          </a:effectRef>
+          <a:fontRef idx="minor">
+            <a:schemeClr val="lt1"/>
+          </a:fontRef>
+        </p:style>
+        <p:txBody>
+          <a:bodyPr rtlCol="0" anchor="ctr"/>
+          <a:lstStyle/>
+          <a:p>
+            <a:pPr algn="ctr"/>
+          </a:p>
+        </p:txBody>
+      </p:sp>
+      <p:sp>
+        <p:nvSpPr>
+          <p:cNvPr id="3" name="Rectangle 2"/>
+          <p:cNvSpPr/>
+          <p:nvPr/>
+        </p:nvSpPr>
+        <p:spPr>
+          <a:xfrm>
+            <a:off x="0" y="0"/>
+            <a:ext cx="6095847" cy="38100"/>
+          </a:xfrm>
+          <a:prstGeom prst="rect">
+            <a:avLst/>
+          </a:prstGeom>
+          <a:solidFill>
+            <a:srgbClr val="0076CE"/>
+          </a:solidFill>
+          <a:ln>
+            <a:noFill/>
+          </a:ln>
+          <a:effectLst/>
+        </p:spPr>
+        <p:style>
+          <a:lnRef idx="1">
+            <a:schemeClr val="accent1"/>
+          </a:lnRef>
+          <a:fillRef idx="3">
+            <a:schemeClr val="accent1"/>
+          </a:fillRef>
+          <a:effectRef idx="2">
+            <a:schemeClr val="accent1"/>
+          </a:effectRef>
+          <a:fontRef idx="minor">
+            <a:schemeClr val="lt1"/>
+          </a:fontRef>
+        </p:style>
+        <p:txBody>
+          <a:bodyPr rtlCol="0" anchor="ctr"/>
+          <a:lstStyle/>
+          <a:p>
+            <a:pPr algn="ctr"/>
+          </a:p>
+        </p:txBody>
+      </p:sp>
+      <p:sp>
+        <p:nvSpPr>
+          <p:cNvPr id="4" name="Rectangle 3"/>
+          <p:cNvSpPr/>
+          <p:nvPr/>
+        </p:nvSpPr>
+        <p:spPr>
+          <a:xfrm>
+            <a:off x="6095847" y="0"/>
+            <a:ext cx="6095847" cy="38100"/>
+          </a:xfrm>
+          <a:prstGeom prst="rect">
+            <a:avLst/>
+          </a:prstGeom>
+          <a:solidFill>
+            <a:srgbClr val="76B900"/>
+          </a:solidFill>
+          <a:ln>
+            <a:noFill/>
+          </a:ln>
+          <a:effectLst/>
+        </p:spPr>
+        <p:style>
+          <a:lnRef idx="1">
+            <a:schemeClr val="accent1"/>
+          </a:lnRef>
+          <a:fillRef idx="3">
+            <a:schemeClr val="accent1"/>
+          </a:fillRef>
+          <a:effectRef idx="2">
+            <a:schemeClr val="accent1"/>
+          </a:effectRef>
+          <a:fontRef idx="minor">
+            <a:schemeClr val="lt1"/>
+          </a:fontRef>
+        </p:style>
+        <p:txBody>
+          <a:bodyPr rtlCol="0" anchor="ctr"/>
+          <a:lstStyle/>
+          <a:p>
+            <a:pPr algn="ctr"/>
+          </a:p>
+        </p:txBody>
+      </p:sp>
+      <p:sp>
+        <p:nvSpPr>
+          <p:cNvPr id="5" name="TextBox 4"/>
+          <p:cNvSpPr txBox="1"/>
+          <p:nvPr/>
+        </p:nvSpPr>
+        <p:spPr>
+          <a:xfrm>
+            <a:off x="731520" y="502920"/>
+            <a:ext cx="10698480" cy="274320"/>
+          </a:xfrm>
+          <a:prstGeom prst="rect">
+            <a:avLst/>
+          </a:prstGeom>
+          <a:noFill/>
+        </p:spPr>
+        <p:txBody>
+          <a:bodyPr wrap="square" lIns="0" rIns="0" tIns="0" bIns="0">
+            <a:spAutoFit/>
+          </a:bodyPr>
+          <a:lstStyle/>
+          <a:p>
+            <a:pPr algn="l">
+              <a:spcAft>
+                <a:spcPts val="400"/>
+              </a:spcAft>
+            </a:pPr>
+            <a:r>
+              <a:rPr sz="1100" b="1">
+                <a:solidFill>
+                  <a:srgbClr val="76B900"/>
+                </a:solidFill>
+                <a:latin typeface="Consolas"/>
+              </a:rPr>
+              <a:t>NEXT STEPS</a:t>
+            </a:r>
+          </a:p>
+        </p:txBody>
+      </p:sp>
+      <p:sp>
+        <p:nvSpPr>
+          <p:cNvPr id="6" name="TextBox 5"/>
+          <p:cNvSpPr txBox="1"/>
+          <p:nvPr/>
+        </p:nvSpPr>
+        <p:spPr>
+          <a:xfrm>
+            <a:off x="731520" y="868680"/>
+            <a:ext cx="10698480" cy="640080"/>
+          </a:xfrm>
+          <a:prstGeom prst="rect">
+            <a:avLst/>
+          </a:prstGeom>
+          <a:noFill/>
+        </p:spPr>
+        <p:txBody>
+          <a:bodyPr wrap="square" lIns="0" rIns="0" tIns="0" bIns="0">
+            <a:spAutoFit/>
+          </a:bodyPr>
+          <a:lstStyle/>
+          <a:p>
+            <a:pPr algn="l">
+              <a:spcAft>
+                <a:spcPts val="0"/>
+              </a:spcAft>
+            </a:pPr>
+            <a:r>
+              <a:rPr sz="3000" b="1">
+                <a:solidFill>
+                  <a:srgbClr val="E8EEF5"/>
+                </a:solidFill>
+                <a:latin typeface="Segoe UI"/>
+              </a:rPr>
+              <a:t>From demo to pilot</a:t>
+            </a:r>
+          </a:p>
+        </p:txBody>
+      </p:sp>
+      <p:sp>
+        <p:nvSpPr>
+          <p:cNvPr id="7" name="Rectangle 6"/>
+          <p:cNvSpPr/>
+          <p:nvPr/>
+        </p:nvSpPr>
+        <p:spPr>
+          <a:xfrm>
+            <a:off x="731520" y="1572768"/>
+            <a:ext cx="1371600" cy="28575"/>
+          </a:xfrm>
+          <a:prstGeom prst="rect">
+            <a:avLst/>
+          </a:prstGeom>
+          <a:solidFill>
+            <a:srgbClr val="76B900"/>
+          </a:solidFill>
+          <a:ln>
+            <a:noFill/>
+          </a:ln>
+          <a:effectLst/>
+        </p:spPr>
+        <p:style>
+          <a:lnRef idx="1">
+            <a:schemeClr val="accent1"/>
+          </a:lnRef>
+          <a:fillRef idx="3">
+            <a:schemeClr val="accent1"/>
+          </a:fillRef>
+          <a:effectRef idx="2">
+            <a:schemeClr val="accent1"/>
+          </a:effectRef>
+          <a:fontRef idx="minor">
+            <a:schemeClr val="lt1"/>
+          </a:fontRef>
+        </p:style>
+        <p:txBody>
+          <a:bodyPr rtlCol="0" anchor="ctr"/>
+          <a:lstStyle/>
+          <a:p>
+            <a:pPr algn="ctr"/>
+          </a:p>
+        </p:txBody>
+      </p:sp>
+      <p:sp>
+        <p:nvSpPr>
+          <p:cNvPr id="8" name="TextBox 7"/>
+          <p:cNvSpPr txBox="1"/>
+          <p:nvPr/>
+        </p:nvSpPr>
+        <p:spPr>
+          <a:xfrm>
+            <a:off x="731520" y="1965960"/>
+            <a:ext cx="10698480" cy="4114800"/>
+          </a:xfrm>
+          <a:prstGeom prst="rect">
+            <a:avLst/>
+          </a:prstGeom>
+          <a:noFill/>
+        </p:spPr>
+        <p:txBody>
+          <a:bodyPr wrap="square" lIns="0" rIns="0" tIns="0" bIns="0">
+            <a:spAutoFit/>
+          </a:bodyPr>
+          <a:lstStyle/>
+          <a:p>
+            <a:pPr algn="l">
+              <a:spcAft>
+                <a:spcPts val="300"/>
+              </a:spcAft>
+            </a:pPr>
+            <a:r>
+              <a:rPr sz="1800" b="1">
+                <a:solidFill>
+                  <a:srgbClr val="E8EEF5"/>
+                </a:solidFill>
+                <a:latin typeface="Segoe UI"/>
+              </a:rPr>
+              <a:t>Run it on your data.</a:t>
+            </a:r>
+          </a:p>
+          <a:p>
+            <a:pPr>
+              <a:spcAft>
+                <a:spcPts val="1300"/>
+              </a:spcAft>
+            </a:pPr>
+            <a:r>
+              <a:rPr sz="1400" b="0">
+                <a:solidFill>
+                  <a:srgbClr val="8BA0B6"/>
+                </a:solidFill>
+                <a:latin typeface="Segoe UI"/>
+              </a:rPr>
+              <a:t>The pipeline is three commands and roughly a minute of compute for a dataset this size. The graph schema adapts to your transaction model.</a:t>
+            </a:r>
+          </a:p>
+          <a:p>
+            <a:pPr>
+              <a:spcAft>
+                <a:spcPts val="300"/>
+              </a:spcAft>
+            </a:pPr>
+            <a:r>
+              <a:rPr sz="1800" b="1">
+                <a:solidFill>
+                  <a:srgbClr val="E8EEF5"/>
+                </a:solidFill>
+                <a:latin typeface="Segoe UI"/>
+              </a:rPr>
+              <a:t>Choose the use case with the clearest data.</a:t>
+            </a:r>
+          </a:p>
+          <a:p>
+            <a:pPr>
+              <a:spcAft>
+                <a:spcPts val="1300"/>
+              </a:spcAft>
+            </a:pPr>
+            <a:r>
+              <a:rPr sz="1400" b="0">
+                <a:solidFill>
+                  <a:srgbClr val="8BA0B6"/>
+                </a:solidFill>
+                <a:latin typeface="Segoe UI"/>
+              </a:rPr>
+              <a:t>Payment fraud and merchant risk need only data an issuer or acquirer already holds. AML and identity graphs need more sourcing.</a:t>
+            </a:r>
+          </a:p>
+          <a:p>
+            <a:pPr>
+              <a:spcAft>
+                <a:spcPts val="300"/>
+              </a:spcAft>
+            </a:pPr>
+            <a:r>
+              <a:rPr sz="1800" b="1">
+                <a:solidFill>
+                  <a:srgbClr val="E8EEF5"/>
+                </a:solidFill>
+                <a:latin typeface="Segoe UI"/>
+              </a:rPr>
+              <a:t>Measure at the true base rate from day one.</a:t>
+            </a:r>
+          </a:p>
+          <a:p>
+            <a:pPr>
+              <a:spcAft>
+                <a:spcPts val="1300"/>
+              </a:spcAft>
+            </a:pPr>
+            <a:r>
+              <a:rPr sz="1400" b="0">
+                <a:solidFill>
+                  <a:srgbClr val="8BA0B6"/>
+                </a:solidFill>
+                <a:latin typeface="Segoe UI"/>
+              </a:rPr>
+              <a:t>Agree the false-positive budget with the fraud operations team before tuning anything.</a:t>
+            </a:r>
+          </a:p>
+          <a:p>
+            <a:pPr>
+              <a:spcAft>
+                <a:spcPts val="300"/>
+              </a:spcAft>
+            </a:pPr>
+            <a:r>
+              <a:rPr sz="1800" b="1">
+                <a:solidFill>
+                  <a:srgbClr val="E8EEF5"/>
+                </a:solidFill>
+                <a:latin typeface="Segoe UI"/>
+              </a:rPr>
+              <a:t>Deploy where the data lives.</a:t>
+            </a:r>
+          </a:p>
+          <a:p>
+            <a:pPr>
+              <a:spcAft>
+                <a:spcPts val="1300"/>
+              </a:spcAft>
+            </a:pPr>
+            <a:r>
+              <a:rPr sz="1400" b="0">
+                <a:solidFill>
+                  <a:srgbClr val="8BA0B6"/>
+                </a:solidFill>
+                <a:latin typeface="Segoe UI"/>
+              </a:rPr>
+              <a:t>One GB10 per site, or scale up the same containers on larger NVIDIA infrastructure — the stack is identical.</a:t>
+            </a:r>
+          </a:p>
+        </p:txBody>
+      </p:sp>
+      <p:sp>
+        <p:nvSpPr>
+          <p:cNvPr id="9" name="Rounded Rectangle 8"/>
+          <p:cNvSpPr/>
+          <p:nvPr/>
+        </p:nvSpPr>
+        <p:spPr>
+          <a:xfrm>
+            <a:off x="731520" y="5440680"/>
+            <a:ext cx="10698480" cy="777240"/>
+          </a:xfrm>
+          <a:prstGeom prst="roundRect">
+            <a:avLst/>
+          </a:prstGeom>
+          <a:solidFill>
+            <a:srgbClr val="141C25"/>
+          </a:solidFill>
+          <a:ln w="9525">
+            <a:solidFill>
+              <a:srgbClr val="22303F"/>
+            </a:solidFill>
+          </a:ln>
+          <a:effectLst/>
+        </p:spPr>
+        <p:style>
+          <a:lnRef idx="1">
+            <a:schemeClr val="accent1"/>
+          </a:lnRef>
+          <a:fillRef idx="3">
+            <a:schemeClr val="accent1"/>
+          </a:fillRef>
+          <a:effectRef idx="2">
+            <a:schemeClr val="accent1"/>
+          </a:effectRef>
+          <a:fontRef idx="minor">
+            <a:schemeClr val="lt1"/>
+          </a:fontRef>
+        </p:style>
+        <p:txBody>
+          <a:bodyPr rtlCol="0" anchor="ctr"/>
+          <a:lstStyle/>
+          <a:p>
+            <a:pPr algn="ctr"/>
+          </a:p>
+        </p:txBody>
+      </p:sp>
+      <p:sp>
+        <p:nvSpPr>
+          <p:cNvPr id="10" name="TextBox 9"/>
+          <p:cNvSpPr txBox="1"/>
+          <p:nvPr/>
+        </p:nvSpPr>
+        <p:spPr>
+          <a:xfrm>
+            <a:off x="1051560" y="5650992"/>
+            <a:ext cx="10058400" cy="411480"/>
+          </a:xfrm>
+          <a:prstGeom prst="rect">
+            <a:avLst/>
+          </a:prstGeom>
+          <a:noFill/>
+        </p:spPr>
+        <p:txBody>
+          <a:bodyPr wrap="square" lIns="0" rIns="0" tIns="0" bIns="0">
+            <a:spAutoFit/>
+          </a:bodyPr>
+          <a:lstStyle/>
+          <a:p>
+            <a:pPr algn="l">
+              <a:spcAft>
+                <a:spcPts val="0"/>
+              </a:spcAft>
+            </a:pPr>
+            <a:r>
+              <a:rPr sz="1300" b="0">
+                <a:solidFill>
+                  <a:srgbClr val="8BA0B6"/>
+                </a:solidFill>
+                <a:latin typeface="Segoe UI"/>
+              </a:rPr>
+              <a:t>Built on the NVIDIA AI Blueprint for Financial Fraud Detection  ·  IBM TabFormer dataset (Apache 2.0)  ·  running on NVIDIA GB10</a:t>
+            </a:r>
+          </a:p>
+        </p:txBody>
+      </p:sp>
+      <p:pic>
+        <p:nvPicPr>
+          <p:cNvPr id="11" name="Picture 10" descr="dell-technologies-white.png"/>
+          <p:cNvPicPr>
+            <a:picLocks noChangeAspect="1"/>
+          </p:cNvPicPr>
+          <p:nvPr/>
+        </p:nvPicPr>
+        <p:blipFill>
+          <a:blip r:embed="rId3"/>
+          <a:stretch>
+            <a:fillRect/>
+          </a:stretch>
+        </p:blipFill>
+        <p:spPr>
+          <a:xfrm>
+            <a:off x="731520" y="6309360"/>
+            <a:ext cx="1853801" cy="237744"/>
+          </a:xfrm>
+          <a:prstGeom prst="rect">
+            <a:avLst/>
+          </a:prstGeom>
+        </p:spPr>
+      </p:pic>
+      <p:sp>
+        <p:nvSpPr>
+          <p:cNvPr id="12" name="Rectangle 11"/>
+          <p:cNvSpPr/>
+          <p:nvPr/>
+        </p:nvSpPr>
+        <p:spPr>
+          <a:xfrm>
+            <a:off x="2786489" y="6303360"/>
+            <a:ext cx="9525" cy="249744"/>
+          </a:xfrm>
+          <a:prstGeom prst="rect">
+            <a:avLst/>
+          </a:prstGeom>
+          <a:solidFill>
+            <a:srgbClr val="22303F"/>
+          </a:solidFill>
+          <a:ln>
+            <a:noFill/>
+          </a:ln>
+          <a:effectLst/>
+        </p:spPr>
+        <p:style>
+          <a:lnRef idx="1">
+            <a:schemeClr val="accent1"/>
+          </a:lnRef>
+          <a:fillRef idx="3">
+            <a:schemeClr val="accent1"/>
+          </a:fillRef>
+          <a:effectRef idx="2">
+            <a:schemeClr val="accent1"/>
+          </a:effectRef>
+          <a:fontRef idx="minor">
+            <a:schemeClr val="lt1"/>
+          </a:fontRef>
+        </p:style>
+        <p:txBody>
+          <a:bodyPr rtlCol="0" anchor="ctr"/>
+          <a:lstStyle/>
+          <a:p>
+            <a:pPr algn="ctr"/>
+          </a:p>
+        </p:txBody>
+      </p:sp>
+      <p:pic>
+        <p:nvPicPr>
+          <p:cNvPr id="13" name="Picture 12" descr="nvidia-white.png"/>
+          <p:cNvPicPr>
+            <a:picLocks noChangeAspect="1"/>
+          </p:cNvPicPr>
+          <p:nvPr/>
+        </p:nvPicPr>
+        <p:blipFill>
+          <a:blip r:embed="rId4"/>
+          <a:stretch>
+            <a:fillRect/>
+          </a:stretch>
+        </p:blipFill>
+        <p:spPr>
+          <a:xfrm>
+            <a:off x="2987657" y="6235660"/>
+            <a:ext cx="523117" cy="385145"/>
+          </a:xfrm>
+          <a:prstGeom prst="rect">
+            <a:avLst/>
+          </a:prstGeom>
+        </p:spPr>
+      </p:pic>
+      <p:sp>
+        <p:nvSpPr>
+          <p:cNvPr id="14" name="TextBox 13"/>
+          <p:cNvSpPr txBox="1"/>
+          <p:nvPr/>
+        </p:nvSpPr>
+        <p:spPr>
+          <a:xfrm>
+            <a:off x="10058400" y="6336792"/>
+            <a:ext cx="1371600" cy="274320"/>
+          </a:xfrm>
+          <a:prstGeom prst="rect">
+            <a:avLst/>
+          </a:prstGeom>
+          <a:noFill/>
+        </p:spPr>
+        <p:txBody>
+          <a:bodyPr wrap="square" lIns="0" rIns="0" tIns="0" bIns="0">
+            <a:spAutoFit/>
+          </a:bodyPr>
+          <a:lstStyle/>
+          <a:p>
+            <a:pPr algn="r">
+              <a:spcAft>
+                <a:spcPts val="0"/>
+              </a:spcAft>
+            </a:pPr>
+            <a:r>
+              <a:rPr sz="1000" b="0">
+                <a:solidFill>
+                  <a:srgbClr val="8BA0B6"/>
+                </a:solidFill>
+                <a:latin typeface="Consolas"/>
+              </a:rPr>
+              <a:t>27 / 27</a:t>
             </a:r>
           </a:p>
         </p:txBody>
@@ -16568,7 +19808,7 @@
                 </a:solidFill>
                 <a:latin typeface="Consolas"/>
               </a:rPr>
-              <a:t>03 / 24</a:t>
+              <a:t>03 / 27</a:t>
             </a:r>
           </a:p>
         </p:txBody>
@@ -18025,7 +21265,7 @@
                 </a:solidFill>
                 <a:latin typeface="Consolas"/>
               </a:rPr>
-              <a:t>04 / 24</a:t>
+              <a:t>04 / 27</a:t>
             </a:r>
           </a:p>
         </p:txBody>
@@ -18823,7 +22063,7 @@
                 </a:solidFill>
                 <a:latin typeface="Consolas"/>
               </a:rPr>
-              <a:t>05 / 24</a:t>
+              <a:t>05 / 27</a:t>
             </a:r>
           </a:p>
         </p:txBody>
@@ -19333,7 +22573,7 @@
                 </a:solidFill>
                 <a:latin typeface="Consolas"/>
               </a:rPr>
-              <a:t>06 / 24</a:t>
+              <a:t>06 / 27</a:t>
             </a:r>
           </a:p>
         </p:txBody>
@@ -19969,7 +23209,7 @@
                 </a:solidFill>
                 <a:latin typeface="Consolas"/>
               </a:rPr>
-              <a:t>07 / 24</a:t>
+              <a:t>07 / 27</a:t>
             </a:r>
           </a:p>
         </p:txBody>
@@ -20459,7 +23699,7 @@
                 </a:solidFill>
                 <a:latin typeface="Segoe UI"/>
               </a:rPr>
-              <a:t>F1 score</a:t>
+              <a:t>F1 score — see caveat</a:t>
             </a:r>
           </a:p>
           <a:p>
@@ -20475,7 +23715,7 @@
                 </a:solidFill>
                 <a:latin typeface="Segoe UI"/>
               </a:rPr>
-              <a:t>precision 94.3% · recall 97.3%</a:t>
+              <a:t>benchmark artefact: honest figure is 0.78</a:t>
             </a:r>
           </a:p>
         </p:txBody>
@@ -21113,7 +24353,7 @@
                 </a:solidFill>
                 <a:latin typeface="Consolas"/>
               </a:rPr>
-              <a:t>08 / 24</a:t>
+              <a:t>08 / 27</a:t>
             </a:r>
           </a:p>
         </p:txBody>
@@ -21667,7 +24907,7 @@
                 </a:solidFill>
                 <a:latin typeface="Consolas"/>
               </a:rPr>
-              <a:t>09 / 24</a:t>
+              <a:t>09 / 27</a:t>
             </a:r>
           </a:p>
         </p:txBody>
